--- a/samples/test_pptx.pptx
+++ b/samples/test_pptx.pptx
@@ -129,7 +129,7 @@
           <p:cNvPr id="2" name="Title 1">
             <a:extLst>
               <a:ext uri="{FF2B5EF4-FFF2-40B4-BE49-F238E27FC236}">
-                <a16:creationId xmlns:a16="http://schemas.microsoft.com/office/drawing/2014/main" id="{BDCB2534-1FCD-A6A7-2437-A5F2FEE3DE22}"/>
+                <a16:creationId xmlns:a16="http://schemas.microsoft.com/office/drawing/2014/main" id="{90C61838-42E6-69A1-DFD1-FEC2527F65E5}"/>
               </a:ext>
             </a:extLst>
           </p:cNvPr>
@@ -166,7 +166,7 @@
           <p:cNvPr id="3" name="Subtitle 2">
             <a:extLst>
               <a:ext uri="{FF2B5EF4-FFF2-40B4-BE49-F238E27FC236}">
-                <a16:creationId xmlns:a16="http://schemas.microsoft.com/office/drawing/2014/main" id="{258BBC1C-AA5B-E079-F1CD-0984B372223B}"/>
+                <a16:creationId xmlns:a16="http://schemas.microsoft.com/office/drawing/2014/main" id="{2BAFF06F-FBB2-42B2-1977-05170536AC1B}"/>
               </a:ext>
             </a:extLst>
           </p:cNvPr>
@@ -236,7 +236,7 @@
           <p:cNvPr id="4" name="Date Placeholder 3">
             <a:extLst>
               <a:ext uri="{FF2B5EF4-FFF2-40B4-BE49-F238E27FC236}">
-                <a16:creationId xmlns:a16="http://schemas.microsoft.com/office/drawing/2014/main" id="{0FF84438-0D85-F1E7-0F45-9512CA93F82C}"/>
+                <a16:creationId xmlns:a16="http://schemas.microsoft.com/office/drawing/2014/main" id="{F6AB109C-9208-18A6-FCD0-FF2A1C3F0E22}"/>
               </a:ext>
             </a:extLst>
           </p:cNvPr>
@@ -252,9 +252,9 @@
           <a:bodyPr/>
           <a:lstStyle/>
           <a:p>
-            <a:fld id="{CBB687F7-C49A-4855-9FDE-8079232C240D}" type="datetimeFigureOut">
+            <a:fld id="{8640AB0A-39C8-4D5F-8DB0-2D5859300311}" type="datetimeFigureOut">
               <a:rPr lang="en-US" smtClean="0"/>
-              <a:t>2/21/2026</a:t>
+              <a:t>3/16/2026</a:t>
             </a:fld>
             <a:endParaRPr lang="en-US"/>
           </a:p>
@@ -265,7 +265,7 @@
           <p:cNvPr id="5" name="Footer Placeholder 4">
             <a:extLst>
               <a:ext uri="{FF2B5EF4-FFF2-40B4-BE49-F238E27FC236}">
-                <a16:creationId xmlns:a16="http://schemas.microsoft.com/office/drawing/2014/main" id="{ED0FB286-5209-6068-3577-1DBD13B606B9}"/>
+                <a16:creationId xmlns:a16="http://schemas.microsoft.com/office/drawing/2014/main" id="{2705124A-0B16-5220-01FB-A2858F1D7A42}"/>
               </a:ext>
             </a:extLst>
           </p:cNvPr>
@@ -290,7 +290,7 @@
           <p:cNvPr id="6" name="Slide Number Placeholder 5">
             <a:extLst>
               <a:ext uri="{FF2B5EF4-FFF2-40B4-BE49-F238E27FC236}">
-                <a16:creationId xmlns:a16="http://schemas.microsoft.com/office/drawing/2014/main" id="{5FA6EBC3-AEFE-104E-47AF-34FDAED10C21}"/>
+                <a16:creationId xmlns:a16="http://schemas.microsoft.com/office/drawing/2014/main" id="{53E1BE64-7D32-3A64-6D16-B69D75C4C157}"/>
               </a:ext>
             </a:extLst>
           </p:cNvPr>
@@ -306,7 +306,7 @@
           <a:bodyPr/>
           <a:lstStyle/>
           <a:p>
-            <a:fld id="{C67D69EA-156E-4BAB-A371-A4BF45380129}" type="slidenum">
+            <a:fld id="{9361F2F8-A3CD-4E9D-9B45-AA7ACC7DECEC}" type="slidenum">
               <a:rPr lang="en-US" smtClean="0"/>
               <a:t>‹#›</a:t>
             </a:fld>
@@ -317,7 +317,7 @@
     </p:spTree>
     <p:extLst>
       <p:ext uri="{BB962C8B-B14F-4D97-AF65-F5344CB8AC3E}">
-        <p14:creationId xmlns:p14="http://schemas.microsoft.com/office/powerpoint/2010/main" val="2431666674"/>
+        <p14:creationId xmlns:p14="http://schemas.microsoft.com/office/powerpoint/2010/main" val="3420887599"/>
       </p:ext>
     </p:extLst>
   </p:cSld>
@@ -349,7 +349,7 @@
           <p:cNvPr id="2" name="Title 1">
             <a:extLst>
               <a:ext uri="{FF2B5EF4-FFF2-40B4-BE49-F238E27FC236}">
-                <a16:creationId xmlns:a16="http://schemas.microsoft.com/office/drawing/2014/main" id="{51E89E1F-0980-4B9C-4653-CB3AE7C598DE}"/>
+                <a16:creationId xmlns:a16="http://schemas.microsoft.com/office/drawing/2014/main" id="{17EED93A-230D-1AAF-2515-1B0E14B3C633}"/>
               </a:ext>
             </a:extLst>
           </p:cNvPr>
@@ -377,7 +377,7 @@
           <p:cNvPr id="3" name="Vertical Text Placeholder 2">
             <a:extLst>
               <a:ext uri="{FF2B5EF4-FFF2-40B4-BE49-F238E27FC236}">
-                <a16:creationId xmlns:a16="http://schemas.microsoft.com/office/drawing/2014/main" id="{54920584-B833-97DC-B6C5-BC4AC8AD6AD9}"/>
+                <a16:creationId xmlns:a16="http://schemas.microsoft.com/office/drawing/2014/main" id="{A21DFA35-DF1C-BFBF-9896-A8BB73D4D676}"/>
               </a:ext>
             </a:extLst>
           </p:cNvPr>
@@ -434,7 +434,7 @@
           <p:cNvPr id="4" name="Date Placeholder 3">
             <a:extLst>
               <a:ext uri="{FF2B5EF4-FFF2-40B4-BE49-F238E27FC236}">
-                <a16:creationId xmlns:a16="http://schemas.microsoft.com/office/drawing/2014/main" id="{3B0F7E50-35C9-F59E-7B91-ADDC891071FB}"/>
+                <a16:creationId xmlns:a16="http://schemas.microsoft.com/office/drawing/2014/main" id="{0AAFC8B6-CC01-CC6C-78DA-07E4A621CEC1}"/>
               </a:ext>
             </a:extLst>
           </p:cNvPr>
@@ -450,9 +450,9 @@
           <a:bodyPr/>
           <a:lstStyle/>
           <a:p>
-            <a:fld id="{CBB687F7-C49A-4855-9FDE-8079232C240D}" type="datetimeFigureOut">
+            <a:fld id="{8640AB0A-39C8-4D5F-8DB0-2D5859300311}" type="datetimeFigureOut">
               <a:rPr lang="en-US" smtClean="0"/>
-              <a:t>2/21/2026</a:t>
+              <a:t>3/16/2026</a:t>
             </a:fld>
             <a:endParaRPr lang="en-US"/>
           </a:p>
@@ -463,7 +463,7 @@
           <p:cNvPr id="5" name="Footer Placeholder 4">
             <a:extLst>
               <a:ext uri="{FF2B5EF4-FFF2-40B4-BE49-F238E27FC236}">
-                <a16:creationId xmlns:a16="http://schemas.microsoft.com/office/drawing/2014/main" id="{7EBECBAF-F86C-F750-1D4E-6CD5399038EB}"/>
+                <a16:creationId xmlns:a16="http://schemas.microsoft.com/office/drawing/2014/main" id="{C95B5967-911C-01B1-D194-0804B2AAF388}"/>
               </a:ext>
             </a:extLst>
           </p:cNvPr>
@@ -488,7 +488,7 @@
           <p:cNvPr id="6" name="Slide Number Placeholder 5">
             <a:extLst>
               <a:ext uri="{FF2B5EF4-FFF2-40B4-BE49-F238E27FC236}">
-                <a16:creationId xmlns:a16="http://schemas.microsoft.com/office/drawing/2014/main" id="{DBC6FE35-A9CB-0DAB-A807-F0C1C8D41AF5}"/>
+                <a16:creationId xmlns:a16="http://schemas.microsoft.com/office/drawing/2014/main" id="{71A82601-796D-0C16-F181-74F21C4215F1}"/>
               </a:ext>
             </a:extLst>
           </p:cNvPr>
@@ -504,7 +504,7 @@
           <a:bodyPr/>
           <a:lstStyle/>
           <a:p>
-            <a:fld id="{C67D69EA-156E-4BAB-A371-A4BF45380129}" type="slidenum">
+            <a:fld id="{9361F2F8-A3CD-4E9D-9B45-AA7ACC7DECEC}" type="slidenum">
               <a:rPr lang="en-US" smtClean="0"/>
               <a:t>‹#›</a:t>
             </a:fld>
@@ -515,7 +515,7 @@
     </p:spTree>
     <p:extLst>
       <p:ext uri="{BB962C8B-B14F-4D97-AF65-F5344CB8AC3E}">
-        <p14:creationId xmlns:p14="http://schemas.microsoft.com/office/powerpoint/2010/main" val="1581098979"/>
+        <p14:creationId xmlns:p14="http://schemas.microsoft.com/office/powerpoint/2010/main" val="4086877408"/>
       </p:ext>
     </p:extLst>
   </p:cSld>
@@ -547,7 +547,7 @@
           <p:cNvPr id="2" name="Vertical Title 1">
             <a:extLst>
               <a:ext uri="{FF2B5EF4-FFF2-40B4-BE49-F238E27FC236}">
-                <a16:creationId xmlns:a16="http://schemas.microsoft.com/office/drawing/2014/main" id="{F1721E3D-5214-74A6-CBD0-44CB7B0DD527}"/>
+                <a16:creationId xmlns:a16="http://schemas.microsoft.com/office/drawing/2014/main" id="{166B2BDC-4A15-8113-0F45-4090971D714E}"/>
               </a:ext>
             </a:extLst>
           </p:cNvPr>
@@ -580,7 +580,7 @@
           <p:cNvPr id="3" name="Vertical Text Placeholder 2">
             <a:extLst>
               <a:ext uri="{FF2B5EF4-FFF2-40B4-BE49-F238E27FC236}">
-                <a16:creationId xmlns:a16="http://schemas.microsoft.com/office/drawing/2014/main" id="{B3E3E17D-2AD2-70DD-8D5E-87B954159BAC}"/>
+                <a16:creationId xmlns:a16="http://schemas.microsoft.com/office/drawing/2014/main" id="{A610259D-EA48-58BA-2D49-3F6695041B69}"/>
               </a:ext>
             </a:extLst>
           </p:cNvPr>
@@ -642,7 +642,7 @@
           <p:cNvPr id="4" name="Date Placeholder 3">
             <a:extLst>
               <a:ext uri="{FF2B5EF4-FFF2-40B4-BE49-F238E27FC236}">
-                <a16:creationId xmlns:a16="http://schemas.microsoft.com/office/drawing/2014/main" id="{D5B9286C-01BE-26A1-6E94-CB364BA82DB1}"/>
+                <a16:creationId xmlns:a16="http://schemas.microsoft.com/office/drawing/2014/main" id="{5CA55CC3-2A48-B4B0-2C17-E3C376B09FE9}"/>
               </a:ext>
             </a:extLst>
           </p:cNvPr>
@@ -658,9 +658,9 @@
           <a:bodyPr/>
           <a:lstStyle/>
           <a:p>
-            <a:fld id="{CBB687F7-C49A-4855-9FDE-8079232C240D}" type="datetimeFigureOut">
+            <a:fld id="{8640AB0A-39C8-4D5F-8DB0-2D5859300311}" type="datetimeFigureOut">
               <a:rPr lang="en-US" smtClean="0"/>
-              <a:t>2/21/2026</a:t>
+              <a:t>3/16/2026</a:t>
             </a:fld>
             <a:endParaRPr lang="en-US"/>
           </a:p>
@@ -671,7 +671,7 @@
           <p:cNvPr id="5" name="Footer Placeholder 4">
             <a:extLst>
               <a:ext uri="{FF2B5EF4-FFF2-40B4-BE49-F238E27FC236}">
-                <a16:creationId xmlns:a16="http://schemas.microsoft.com/office/drawing/2014/main" id="{94BF24CE-D1D1-81E4-1956-81394F03B85E}"/>
+                <a16:creationId xmlns:a16="http://schemas.microsoft.com/office/drawing/2014/main" id="{987956FB-D43B-9254-D84F-D5F259992FEB}"/>
               </a:ext>
             </a:extLst>
           </p:cNvPr>
@@ -696,7 +696,7 @@
           <p:cNvPr id="6" name="Slide Number Placeholder 5">
             <a:extLst>
               <a:ext uri="{FF2B5EF4-FFF2-40B4-BE49-F238E27FC236}">
-                <a16:creationId xmlns:a16="http://schemas.microsoft.com/office/drawing/2014/main" id="{8D8D8070-3E16-7D2F-3CB3-8D6CAD843FCA}"/>
+                <a16:creationId xmlns:a16="http://schemas.microsoft.com/office/drawing/2014/main" id="{6B53F844-8DA3-E580-945B-B0818B2E4EFA}"/>
               </a:ext>
             </a:extLst>
           </p:cNvPr>
@@ -712,7 +712,7 @@
           <a:bodyPr/>
           <a:lstStyle/>
           <a:p>
-            <a:fld id="{C67D69EA-156E-4BAB-A371-A4BF45380129}" type="slidenum">
+            <a:fld id="{9361F2F8-A3CD-4E9D-9B45-AA7ACC7DECEC}" type="slidenum">
               <a:rPr lang="en-US" smtClean="0"/>
               <a:t>‹#›</a:t>
             </a:fld>
@@ -723,7 +723,7 @@
     </p:spTree>
     <p:extLst>
       <p:ext uri="{BB962C8B-B14F-4D97-AF65-F5344CB8AC3E}">
-        <p14:creationId xmlns:p14="http://schemas.microsoft.com/office/powerpoint/2010/main" val="2003180323"/>
+        <p14:creationId xmlns:p14="http://schemas.microsoft.com/office/powerpoint/2010/main" val="2870412579"/>
       </p:ext>
     </p:extLst>
   </p:cSld>
@@ -755,7 +755,7 @@
           <p:cNvPr id="2" name="Title 1">
             <a:extLst>
               <a:ext uri="{FF2B5EF4-FFF2-40B4-BE49-F238E27FC236}">
-                <a16:creationId xmlns:a16="http://schemas.microsoft.com/office/drawing/2014/main" id="{5F507A48-3E5B-4BC0-E1FB-CB14CD9AA2F2}"/>
+                <a16:creationId xmlns:a16="http://schemas.microsoft.com/office/drawing/2014/main" id="{E0CFC717-6322-CF80-326C-8A29B171CF82}"/>
               </a:ext>
             </a:extLst>
           </p:cNvPr>
@@ -783,7 +783,7 @@
           <p:cNvPr id="3" name="Content Placeholder 2">
             <a:extLst>
               <a:ext uri="{FF2B5EF4-FFF2-40B4-BE49-F238E27FC236}">
-                <a16:creationId xmlns:a16="http://schemas.microsoft.com/office/drawing/2014/main" id="{B555E15F-325A-B4D0-9902-8D5F2E3CBA76}"/>
+                <a16:creationId xmlns:a16="http://schemas.microsoft.com/office/drawing/2014/main" id="{C7736629-BB67-D845-6158-A336B5C21BCF}"/>
               </a:ext>
             </a:extLst>
           </p:cNvPr>
@@ -840,7 +840,7 @@
           <p:cNvPr id="4" name="Date Placeholder 3">
             <a:extLst>
               <a:ext uri="{FF2B5EF4-FFF2-40B4-BE49-F238E27FC236}">
-                <a16:creationId xmlns:a16="http://schemas.microsoft.com/office/drawing/2014/main" id="{174935FE-4356-8923-52B1-0D9EAF1E4485}"/>
+                <a16:creationId xmlns:a16="http://schemas.microsoft.com/office/drawing/2014/main" id="{095813D6-F6CC-C9AD-EF98-8906F515F92D}"/>
               </a:ext>
             </a:extLst>
           </p:cNvPr>
@@ -856,9 +856,9 @@
           <a:bodyPr/>
           <a:lstStyle/>
           <a:p>
-            <a:fld id="{CBB687F7-C49A-4855-9FDE-8079232C240D}" type="datetimeFigureOut">
+            <a:fld id="{8640AB0A-39C8-4D5F-8DB0-2D5859300311}" type="datetimeFigureOut">
               <a:rPr lang="en-US" smtClean="0"/>
-              <a:t>2/21/2026</a:t>
+              <a:t>3/16/2026</a:t>
             </a:fld>
             <a:endParaRPr lang="en-US"/>
           </a:p>
@@ -869,7 +869,7 @@
           <p:cNvPr id="5" name="Footer Placeholder 4">
             <a:extLst>
               <a:ext uri="{FF2B5EF4-FFF2-40B4-BE49-F238E27FC236}">
-                <a16:creationId xmlns:a16="http://schemas.microsoft.com/office/drawing/2014/main" id="{E980A260-2FB4-A91D-5AB7-35B715DE5104}"/>
+                <a16:creationId xmlns:a16="http://schemas.microsoft.com/office/drawing/2014/main" id="{5D35A646-6C84-4575-F859-5242E07AB8C7}"/>
               </a:ext>
             </a:extLst>
           </p:cNvPr>
@@ -894,7 +894,7 @@
           <p:cNvPr id="6" name="Slide Number Placeholder 5">
             <a:extLst>
               <a:ext uri="{FF2B5EF4-FFF2-40B4-BE49-F238E27FC236}">
-                <a16:creationId xmlns:a16="http://schemas.microsoft.com/office/drawing/2014/main" id="{AB04C35A-C4F7-7006-EFFD-1B8A5ED7E85C}"/>
+                <a16:creationId xmlns:a16="http://schemas.microsoft.com/office/drawing/2014/main" id="{8E92DDB4-5343-1871-CBA5-715BBEFF5160}"/>
               </a:ext>
             </a:extLst>
           </p:cNvPr>
@@ -910,7 +910,7 @@
           <a:bodyPr/>
           <a:lstStyle/>
           <a:p>
-            <a:fld id="{C67D69EA-156E-4BAB-A371-A4BF45380129}" type="slidenum">
+            <a:fld id="{9361F2F8-A3CD-4E9D-9B45-AA7ACC7DECEC}" type="slidenum">
               <a:rPr lang="en-US" smtClean="0"/>
               <a:t>‹#›</a:t>
             </a:fld>
@@ -921,7 +921,7 @@
     </p:spTree>
     <p:extLst>
       <p:ext uri="{BB962C8B-B14F-4D97-AF65-F5344CB8AC3E}">
-        <p14:creationId xmlns:p14="http://schemas.microsoft.com/office/powerpoint/2010/main" val="241425838"/>
+        <p14:creationId xmlns:p14="http://schemas.microsoft.com/office/powerpoint/2010/main" val="3282230454"/>
       </p:ext>
     </p:extLst>
   </p:cSld>
@@ -953,7 +953,7 @@
           <p:cNvPr id="2" name="Title 1">
             <a:extLst>
               <a:ext uri="{FF2B5EF4-FFF2-40B4-BE49-F238E27FC236}">
-                <a16:creationId xmlns:a16="http://schemas.microsoft.com/office/drawing/2014/main" id="{714A8F32-ABC6-E3D9-2010-120386A900EE}"/>
+                <a16:creationId xmlns:a16="http://schemas.microsoft.com/office/drawing/2014/main" id="{EBC5CC28-BF9D-63BF-9FCF-9524195925E4}"/>
               </a:ext>
             </a:extLst>
           </p:cNvPr>
@@ -990,7 +990,7 @@
           <p:cNvPr id="3" name="Text Placeholder 2">
             <a:extLst>
               <a:ext uri="{FF2B5EF4-FFF2-40B4-BE49-F238E27FC236}">
-                <a16:creationId xmlns:a16="http://schemas.microsoft.com/office/drawing/2014/main" id="{8799838C-8826-0956-889C-B090867FFBF7}"/>
+                <a16:creationId xmlns:a16="http://schemas.microsoft.com/office/drawing/2014/main" id="{A901E8C3-ABBB-9A87-827F-482BAE268913}"/>
               </a:ext>
             </a:extLst>
           </p:cNvPr>
@@ -1115,7 +1115,7 @@
           <p:cNvPr id="4" name="Date Placeholder 3">
             <a:extLst>
               <a:ext uri="{FF2B5EF4-FFF2-40B4-BE49-F238E27FC236}">
-                <a16:creationId xmlns:a16="http://schemas.microsoft.com/office/drawing/2014/main" id="{C2D8BD0F-365C-1202-2055-178D989DE3D8}"/>
+                <a16:creationId xmlns:a16="http://schemas.microsoft.com/office/drawing/2014/main" id="{2FA19CA2-5FAF-1498-CED5-3B2B89F4D22E}"/>
               </a:ext>
             </a:extLst>
           </p:cNvPr>
@@ -1131,9 +1131,9 @@
           <a:bodyPr/>
           <a:lstStyle/>
           <a:p>
-            <a:fld id="{CBB687F7-C49A-4855-9FDE-8079232C240D}" type="datetimeFigureOut">
+            <a:fld id="{8640AB0A-39C8-4D5F-8DB0-2D5859300311}" type="datetimeFigureOut">
               <a:rPr lang="en-US" smtClean="0"/>
-              <a:t>2/21/2026</a:t>
+              <a:t>3/16/2026</a:t>
             </a:fld>
             <a:endParaRPr lang="en-US"/>
           </a:p>
@@ -1144,7 +1144,7 @@
           <p:cNvPr id="5" name="Footer Placeholder 4">
             <a:extLst>
               <a:ext uri="{FF2B5EF4-FFF2-40B4-BE49-F238E27FC236}">
-                <a16:creationId xmlns:a16="http://schemas.microsoft.com/office/drawing/2014/main" id="{9FA0181B-B790-D169-9C5C-7741796EBFEC}"/>
+                <a16:creationId xmlns:a16="http://schemas.microsoft.com/office/drawing/2014/main" id="{F5B42823-DE81-87BF-1F42-0A971240F371}"/>
               </a:ext>
             </a:extLst>
           </p:cNvPr>
@@ -1169,7 +1169,7 @@
           <p:cNvPr id="6" name="Slide Number Placeholder 5">
             <a:extLst>
               <a:ext uri="{FF2B5EF4-FFF2-40B4-BE49-F238E27FC236}">
-                <a16:creationId xmlns:a16="http://schemas.microsoft.com/office/drawing/2014/main" id="{B313CF54-CF1E-F80A-1240-AF743B2A0265}"/>
+                <a16:creationId xmlns:a16="http://schemas.microsoft.com/office/drawing/2014/main" id="{394C6665-DA37-B035-A9D3-F8B874D366A0}"/>
               </a:ext>
             </a:extLst>
           </p:cNvPr>
@@ -1185,7 +1185,7 @@
           <a:bodyPr/>
           <a:lstStyle/>
           <a:p>
-            <a:fld id="{C67D69EA-156E-4BAB-A371-A4BF45380129}" type="slidenum">
+            <a:fld id="{9361F2F8-A3CD-4E9D-9B45-AA7ACC7DECEC}" type="slidenum">
               <a:rPr lang="en-US" smtClean="0"/>
               <a:t>‹#›</a:t>
             </a:fld>
@@ -1196,7 +1196,7 @@
     </p:spTree>
     <p:extLst>
       <p:ext uri="{BB962C8B-B14F-4D97-AF65-F5344CB8AC3E}">
-        <p14:creationId xmlns:p14="http://schemas.microsoft.com/office/powerpoint/2010/main" val="1217373211"/>
+        <p14:creationId xmlns:p14="http://schemas.microsoft.com/office/powerpoint/2010/main" val="2261606617"/>
       </p:ext>
     </p:extLst>
   </p:cSld>
@@ -1228,7 +1228,7 @@
           <p:cNvPr id="2" name="Title 1">
             <a:extLst>
               <a:ext uri="{FF2B5EF4-FFF2-40B4-BE49-F238E27FC236}">
-                <a16:creationId xmlns:a16="http://schemas.microsoft.com/office/drawing/2014/main" id="{F33F37C2-F1D5-8C02-43E5-039B0A7AAEAC}"/>
+                <a16:creationId xmlns:a16="http://schemas.microsoft.com/office/drawing/2014/main" id="{9963EFD0-28B4-B972-152C-A486D60EFFB3}"/>
               </a:ext>
             </a:extLst>
           </p:cNvPr>
@@ -1256,7 +1256,7 @@
           <p:cNvPr id="3" name="Content Placeholder 2">
             <a:extLst>
               <a:ext uri="{FF2B5EF4-FFF2-40B4-BE49-F238E27FC236}">
-                <a16:creationId xmlns:a16="http://schemas.microsoft.com/office/drawing/2014/main" id="{FF04A62F-42C3-7074-E8A6-676F2DA1432C}"/>
+                <a16:creationId xmlns:a16="http://schemas.microsoft.com/office/drawing/2014/main" id="{24F7880F-F514-4588-13CD-402FA909AAED}"/>
               </a:ext>
             </a:extLst>
           </p:cNvPr>
@@ -1318,7 +1318,7 @@
           <p:cNvPr id="4" name="Content Placeholder 3">
             <a:extLst>
               <a:ext uri="{FF2B5EF4-FFF2-40B4-BE49-F238E27FC236}">
-                <a16:creationId xmlns:a16="http://schemas.microsoft.com/office/drawing/2014/main" id="{28B525D8-4085-A730-25D9-A20DCDE334D3}"/>
+                <a16:creationId xmlns:a16="http://schemas.microsoft.com/office/drawing/2014/main" id="{04890AEC-F639-7CB3-9DE0-F904279E69A1}"/>
               </a:ext>
             </a:extLst>
           </p:cNvPr>
@@ -1380,7 +1380,7 @@
           <p:cNvPr id="5" name="Date Placeholder 4">
             <a:extLst>
               <a:ext uri="{FF2B5EF4-FFF2-40B4-BE49-F238E27FC236}">
-                <a16:creationId xmlns:a16="http://schemas.microsoft.com/office/drawing/2014/main" id="{2EAF86BD-FDCA-8BF3-F94A-7E50C41CCA5D}"/>
+                <a16:creationId xmlns:a16="http://schemas.microsoft.com/office/drawing/2014/main" id="{59017B0C-2339-9271-64B9-C3D9E1C33977}"/>
               </a:ext>
             </a:extLst>
           </p:cNvPr>
@@ -1396,9 +1396,9 @@
           <a:bodyPr/>
           <a:lstStyle/>
           <a:p>
-            <a:fld id="{CBB687F7-C49A-4855-9FDE-8079232C240D}" type="datetimeFigureOut">
+            <a:fld id="{8640AB0A-39C8-4D5F-8DB0-2D5859300311}" type="datetimeFigureOut">
               <a:rPr lang="en-US" smtClean="0"/>
-              <a:t>2/21/2026</a:t>
+              <a:t>3/16/2026</a:t>
             </a:fld>
             <a:endParaRPr lang="en-US"/>
           </a:p>
@@ -1409,7 +1409,7 @@
           <p:cNvPr id="6" name="Footer Placeholder 5">
             <a:extLst>
               <a:ext uri="{FF2B5EF4-FFF2-40B4-BE49-F238E27FC236}">
-                <a16:creationId xmlns:a16="http://schemas.microsoft.com/office/drawing/2014/main" id="{929BBCFA-480E-9EBD-C71F-3936E908E3DF}"/>
+                <a16:creationId xmlns:a16="http://schemas.microsoft.com/office/drawing/2014/main" id="{150DF103-51DE-2867-8BCE-EB5B7BA92B8B}"/>
               </a:ext>
             </a:extLst>
           </p:cNvPr>
@@ -1434,7 +1434,7 @@
           <p:cNvPr id="7" name="Slide Number Placeholder 6">
             <a:extLst>
               <a:ext uri="{FF2B5EF4-FFF2-40B4-BE49-F238E27FC236}">
-                <a16:creationId xmlns:a16="http://schemas.microsoft.com/office/drawing/2014/main" id="{229D9DB2-861C-965B-1DD0-64F565FD6748}"/>
+                <a16:creationId xmlns:a16="http://schemas.microsoft.com/office/drawing/2014/main" id="{95A6D8C5-39E7-A028-4E4A-73741FFB2086}"/>
               </a:ext>
             </a:extLst>
           </p:cNvPr>
@@ -1450,7 +1450,7 @@
           <a:bodyPr/>
           <a:lstStyle/>
           <a:p>
-            <a:fld id="{C67D69EA-156E-4BAB-A371-A4BF45380129}" type="slidenum">
+            <a:fld id="{9361F2F8-A3CD-4E9D-9B45-AA7ACC7DECEC}" type="slidenum">
               <a:rPr lang="en-US" smtClean="0"/>
               <a:t>‹#›</a:t>
             </a:fld>
@@ -1461,7 +1461,7 @@
     </p:spTree>
     <p:extLst>
       <p:ext uri="{BB962C8B-B14F-4D97-AF65-F5344CB8AC3E}">
-        <p14:creationId xmlns:p14="http://schemas.microsoft.com/office/powerpoint/2010/main" val="2727555287"/>
+        <p14:creationId xmlns:p14="http://schemas.microsoft.com/office/powerpoint/2010/main" val="1662414381"/>
       </p:ext>
     </p:extLst>
   </p:cSld>
@@ -1493,7 +1493,7 @@
           <p:cNvPr id="2" name="Title 1">
             <a:extLst>
               <a:ext uri="{FF2B5EF4-FFF2-40B4-BE49-F238E27FC236}">
-                <a16:creationId xmlns:a16="http://schemas.microsoft.com/office/drawing/2014/main" id="{67ED3F07-E1E4-5ABC-D1D0-ECCF18D276C9}"/>
+                <a16:creationId xmlns:a16="http://schemas.microsoft.com/office/drawing/2014/main" id="{7FCE11C3-F0E4-8255-B00D-A966A8A8E9CA}"/>
               </a:ext>
             </a:extLst>
           </p:cNvPr>
@@ -1526,7 +1526,7 @@
           <p:cNvPr id="3" name="Text Placeholder 2">
             <a:extLst>
               <a:ext uri="{FF2B5EF4-FFF2-40B4-BE49-F238E27FC236}">
-                <a16:creationId xmlns:a16="http://schemas.microsoft.com/office/drawing/2014/main" id="{7B827901-D039-AC3A-15CC-AE328DFCF614}"/>
+                <a16:creationId xmlns:a16="http://schemas.microsoft.com/office/drawing/2014/main" id="{D7883732-0F37-A765-D9C6-EDF68EF10244}"/>
               </a:ext>
             </a:extLst>
           </p:cNvPr>
@@ -1597,7 +1597,7 @@
           <p:cNvPr id="4" name="Content Placeholder 3">
             <a:extLst>
               <a:ext uri="{FF2B5EF4-FFF2-40B4-BE49-F238E27FC236}">
-                <a16:creationId xmlns:a16="http://schemas.microsoft.com/office/drawing/2014/main" id="{3E95C3E8-88A1-3929-119E-D50DC3E3408A}"/>
+                <a16:creationId xmlns:a16="http://schemas.microsoft.com/office/drawing/2014/main" id="{66BFD4B5-FB58-935C-89C8-EBC538219CA5}"/>
               </a:ext>
             </a:extLst>
           </p:cNvPr>
@@ -1659,7 +1659,7 @@
           <p:cNvPr id="5" name="Text Placeholder 4">
             <a:extLst>
               <a:ext uri="{FF2B5EF4-FFF2-40B4-BE49-F238E27FC236}">
-                <a16:creationId xmlns:a16="http://schemas.microsoft.com/office/drawing/2014/main" id="{17AD0B58-4F2D-493E-9B52-8B32AF39622C}"/>
+                <a16:creationId xmlns:a16="http://schemas.microsoft.com/office/drawing/2014/main" id="{A46AF1A7-4CC8-9573-268B-46836FCD7148}"/>
               </a:ext>
             </a:extLst>
           </p:cNvPr>
@@ -1730,7 +1730,7 @@
           <p:cNvPr id="6" name="Content Placeholder 5">
             <a:extLst>
               <a:ext uri="{FF2B5EF4-FFF2-40B4-BE49-F238E27FC236}">
-                <a16:creationId xmlns:a16="http://schemas.microsoft.com/office/drawing/2014/main" id="{65D43803-A721-2229-72CA-83E280E9CF78}"/>
+                <a16:creationId xmlns:a16="http://schemas.microsoft.com/office/drawing/2014/main" id="{5B06C50D-0DB3-8FB5-4885-D3E3089752D9}"/>
               </a:ext>
             </a:extLst>
           </p:cNvPr>
@@ -1792,7 +1792,7 @@
           <p:cNvPr id="7" name="Date Placeholder 6">
             <a:extLst>
               <a:ext uri="{FF2B5EF4-FFF2-40B4-BE49-F238E27FC236}">
-                <a16:creationId xmlns:a16="http://schemas.microsoft.com/office/drawing/2014/main" id="{227E1312-12EC-50CF-6A6D-DD3E79205DF0}"/>
+                <a16:creationId xmlns:a16="http://schemas.microsoft.com/office/drawing/2014/main" id="{1ECF00F0-5E96-543D-F0D8-D587990C8409}"/>
               </a:ext>
             </a:extLst>
           </p:cNvPr>
@@ -1808,9 +1808,9 @@
           <a:bodyPr/>
           <a:lstStyle/>
           <a:p>
-            <a:fld id="{CBB687F7-C49A-4855-9FDE-8079232C240D}" type="datetimeFigureOut">
+            <a:fld id="{8640AB0A-39C8-4D5F-8DB0-2D5859300311}" type="datetimeFigureOut">
               <a:rPr lang="en-US" smtClean="0"/>
-              <a:t>2/21/2026</a:t>
+              <a:t>3/16/2026</a:t>
             </a:fld>
             <a:endParaRPr lang="en-US"/>
           </a:p>
@@ -1821,7 +1821,7 @@
           <p:cNvPr id="8" name="Footer Placeholder 7">
             <a:extLst>
               <a:ext uri="{FF2B5EF4-FFF2-40B4-BE49-F238E27FC236}">
-                <a16:creationId xmlns:a16="http://schemas.microsoft.com/office/drawing/2014/main" id="{5BB99B7B-39EF-F292-0052-7FD33B971B88}"/>
+                <a16:creationId xmlns:a16="http://schemas.microsoft.com/office/drawing/2014/main" id="{9236252E-7CB7-D51D-33C0-BA8E6D70EB7A}"/>
               </a:ext>
             </a:extLst>
           </p:cNvPr>
@@ -1846,7 +1846,7 @@
           <p:cNvPr id="9" name="Slide Number Placeholder 8">
             <a:extLst>
               <a:ext uri="{FF2B5EF4-FFF2-40B4-BE49-F238E27FC236}">
-                <a16:creationId xmlns:a16="http://schemas.microsoft.com/office/drawing/2014/main" id="{02957533-E169-7A85-3A3B-6FA017715C5B}"/>
+                <a16:creationId xmlns:a16="http://schemas.microsoft.com/office/drawing/2014/main" id="{C4E87D6B-90FE-FFC8-7CA7-664C0D8DCAF5}"/>
               </a:ext>
             </a:extLst>
           </p:cNvPr>
@@ -1862,7 +1862,7 @@
           <a:bodyPr/>
           <a:lstStyle/>
           <a:p>
-            <a:fld id="{C67D69EA-156E-4BAB-A371-A4BF45380129}" type="slidenum">
+            <a:fld id="{9361F2F8-A3CD-4E9D-9B45-AA7ACC7DECEC}" type="slidenum">
               <a:rPr lang="en-US" smtClean="0"/>
               <a:t>‹#›</a:t>
             </a:fld>
@@ -1873,7 +1873,7 @@
     </p:spTree>
     <p:extLst>
       <p:ext uri="{BB962C8B-B14F-4D97-AF65-F5344CB8AC3E}">
-        <p14:creationId xmlns:p14="http://schemas.microsoft.com/office/powerpoint/2010/main" val="3963058309"/>
+        <p14:creationId xmlns:p14="http://schemas.microsoft.com/office/powerpoint/2010/main" val="3347981107"/>
       </p:ext>
     </p:extLst>
   </p:cSld>
@@ -1905,7 +1905,7 @@
           <p:cNvPr id="2" name="Title 1">
             <a:extLst>
               <a:ext uri="{FF2B5EF4-FFF2-40B4-BE49-F238E27FC236}">
-                <a16:creationId xmlns:a16="http://schemas.microsoft.com/office/drawing/2014/main" id="{D8FE581C-3D2A-346E-FD50-E21E44D6D952}"/>
+                <a16:creationId xmlns:a16="http://schemas.microsoft.com/office/drawing/2014/main" id="{B96C9DAA-1B45-21E4-3A98-674A66993F52}"/>
               </a:ext>
             </a:extLst>
           </p:cNvPr>
@@ -1933,7 +1933,7 @@
           <p:cNvPr id="3" name="Date Placeholder 2">
             <a:extLst>
               <a:ext uri="{FF2B5EF4-FFF2-40B4-BE49-F238E27FC236}">
-                <a16:creationId xmlns:a16="http://schemas.microsoft.com/office/drawing/2014/main" id="{3E18F9BD-E4CB-8757-FE8E-F4E158B0D248}"/>
+                <a16:creationId xmlns:a16="http://schemas.microsoft.com/office/drawing/2014/main" id="{1F1775A7-E949-F39A-11E4-36CD5FF9DC1C}"/>
               </a:ext>
             </a:extLst>
           </p:cNvPr>
@@ -1949,9 +1949,9 @@
           <a:bodyPr/>
           <a:lstStyle/>
           <a:p>
-            <a:fld id="{CBB687F7-C49A-4855-9FDE-8079232C240D}" type="datetimeFigureOut">
+            <a:fld id="{8640AB0A-39C8-4D5F-8DB0-2D5859300311}" type="datetimeFigureOut">
               <a:rPr lang="en-US" smtClean="0"/>
-              <a:t>2/21/2026</a:t>
+              <a:t>3/16/2026</a:t>
             </a:fld>
             <a:endParaRPr lang="en-US"/>
           </a:p>
@@ -1962,7 +1962,7 @@
           <p:cNvPr id="4" name="Footer Placeholder 3">
             <a:extLst>
               <a:ext uri="{FF2B5EF4-FFF2-40B4-BE49-F238E27FC236}">
-                <a16:creationId xmlns:a16="http://schemas.microsoft.com/office/drawing/2014/main" id="{AAB1B5EF-3CCF-D9BD-0E84-E8C0A858C37F}"/>
+                <a16:creationId xmlns:a16="http://schemas.microsoft.com/office/drawing/2014/main" id="{A4376571-3D10-A398-4A36-29A591FC3206}"/>
               </a:ext>
             </a:extLst>
           </p:cNvPr>
@@ -1987,7 +1987,7 @@
           <p:cNvPr id="5" name="Slide Number Placeholder 4">
             <a:extLst>
               <a:ext uri="{FF2B5EF4-FFF2-40B4-BE49-F238E27FC236}">
-                <a16:creationId xmlns:a16="http://schemas.microsoft.com/office/drawing/2014/main" id="{E5CD48CD-32DD-AA5C-9185-40F147169FB7}"/>
+                <a16:creationId xmlns:a16="http://schemas.microsoft.com/office/drawing/2014/main" id="{74C26E88-7918-1A32-B57F-B89323FD92C3}"/>
               </a:ext>
             </a:extLst>
           </p:cNvPr>
@@ -2003,7 +2003,7 @@
           <a:bodyPr/>
           <a:lstStyle/>
           <a:p>
-            <a:fld id="{C67D69EA-156E-4BAB-A371-A4BF45380129}" type="slidenum">
+            <a:fld id="{9361F2F8-A3CD-4E9D-9B45-AA7ACC7DECEC}" type="slidenum">
               <a:rPr lang="en-US" smtClean="0"/>
               <a:t>‹#›</a:t>
             </a:fld>
@@ -2014,7 +2014,7 @@
     </p:spTree>
     <p:extLst>
       <p:ext uri="{BB962C8B-B14F-4D97-AF65-F5344CB8AC3E}">
-        <p14:creationId xmlns:p14="http://schemas.microsoft.com/office/powerpoint/2010/main" val="1269455626"/>
+        <p14:creationId xmlns:p14="http://schemas.microsoft.com/office/powerpoint/2010/main" val="3147313033"/>
       </p:ext>
     </p:extLst>
   </p:cSld>
@@ -2046,7 +2046,7 @@
           <p:cNvPr id="2" name="Date Placeholder 1">
             <a:extLst>
               <a:ext uri="{FF2B5EF4-FFF2-40B4-BE49-F238E27FC236}">
-                <a16:creationId xmlns:a16="http://schemas.microsoft.com/office/drawing/2014/main" id="{8E75B8CD-7372-C370-034D-97D18C1278A6}"/>
+                <a16:creationId xmlns:a16="http://schemas.microsoft.com/office/drawing/2014/main" id="{E7677752-4AA7-E700-D835-6217E4A92CEC}"/>
               </a:ext>
             </a:extLst>
           </p:cNvPr>
@@ -2062,9 +2062,9 @@
           <a:bodyPr/>
           <a:lstStyle/>
           <a:p>
-            <a:fld id="{CBB687F7-C49A-4855-9FDE-8079232C240D}" type="datetimeFigureOut">
+            <a:fld id="{8640AB0A-39C8-4D5F-8DB0-2D5859300311}" type="datetimeFigureOut">
               <a:rPr lang="en-US" smtClean="0"/>
-              <a:t>2/21/2026</a:t>
+              <a:t>3/16/2026</a:t>
             </a:fld>
             <a:endParaRPr lang="en-US"/>
           </a:p>
@@ -2075,7 +2075,7 @@
           <p:cNvPr id="3" name="Footer Placeholder 2">
             <a:extLst>
               <a:ext uri="{FF2B5EF4-FFF2-40B4-BE49-F238E27FC236}">
-                <a16:creationId xmlns:a16="http://schemas.microsoft.com/office/drawing/2014/main" id="{EBF6D176-304B-B34C-758A-9FA5D732BC7F}"/>
+                <a16:creationId xmlns:a16="http://schemas.microsoft.com/office/drawing/2014/main" id="{E97008B9-5DF4-5828-4FFD-26B110F782FB}"/>
               </a:ext>
             </a:extLst>
           </p:cNvPr>
@@ -2100,7 +2100,7 @@
           <p:cNvPr id="4" name="Slide Number Placeholder 3">
             <a:extLst>
               <a:ext uri="{FF2B5EF4-FFF2-40B4-BE49-F238E27FC236}">
-                <a16:creationId xmlns:a16="http://schemas.microsoft.com/office/drawing/2014/main" id="{325D41D8-9782-EE4C-5C23-E5710DB409EC}"/>
+                <a16:creationId xmlns:a16="http://schemas.microsoft.com/office/drawing/2014/main" id="{AC393CDC-AF31-EEB6-0DDF-42FF10330A27}"/>
               </a:ext>
             </a:extLst>
           </p:cNvPr>
@@ -2116,7 +2116,7 @@
           <a:bodyPr/>
           <a:lstStyle/>
           <a:p>
-            <a:fld id="{C67D69EA-156E-4BAB-A371-A4BF45380129}" type="slidenum">
+            <a:fld id="{9361F2F8-A3CD-4E9D-9B45-AA7ACC7DECEC}" type="slidenum">
               <a:rPr lang="en-US" smtClean="0"/>
               <a:t>‹#›</a:t>
             </a:fld>
@@ -2127,7 +2127,7 @@
     </p:spTree>
     <p:extLst>
       <p:ext uri="{BB962C8B-B14F-4D97-AF65-F5344CB8AC3E}">
-        <p14:creationId xmlns:p14="http://schemas.microsoft.com/office/powerpoint/2010/main" val="2935521768"/>
+        <p14:creationId xmlns:p14="http://schemas.microsoft.com/office/powerpoint/2010/main" val="2466160409"/>
       </p:ext>
     </p:extLst>
   </p:cSld>
@@ -2159,7 +2159,7 @@
           <p:cNvPr id="2" name="Title 1">
             <a:extLst>
               <a:ext uri="{FF2B5EF4-FFF2-40B4-BE49-F238E27FC236}">
-                <a16:creationId xmlns:a16="http://schemas.microsoft.com/office/drawing/2014/main" id="{70093402-19B3-8534-945B-5F635FB57DC3}"/>
+                <a16:creationId xmlns:a16="http://schemas.microsoft.com/office/drawing/2014/main" id="{DE38B238-5405-9912-1D05-9AFDB3F3B49A}"/>
               </a:ext>
             </a:extLst>
           </p:cNvPr>
@@ -2196,7 +2196,7 @@
           <p:cNvPr id="3" name="Content Placeholder 2">
             <a:extLst>
               <a:ext uri="{FF2B5EF4-FFF2-40B4-BE49-F238E27FC236}">
-                <a16:creationId xmlns:a16="http://schemas.microsoft.com/office/drawing/2014/main" id="{E1E5CA47-B8A2-0948-8730-EA3C958DFFDE}"/>
+                <a16:creationId xmlns:a16="http://schemas.microsoft.com/office/drawing/2014/main" id="{4D9742F2-3F92-D4C8-6767-D23208123BBB}"/>
               </a:ext>
             </a:extLst>
           </p:cNvPr>
@@ -2286,7 +2286,7 @@
           <p:cNvPr id="4" name="Text Placeholder 3">
             <a:extLst>
               <a:ext uri="{FF2B5EF4-FFF2-40B4-BE49-F238E27FC236}">
-                <a16:creationId xmlns:a16="http://schemas.microsoft.com/office/drawing/2014/main" id="{22BC1CC3-12AF-B29C-0488-FEE4038ACEAA}"/>
+                <a16:creationId xmlns:a16="http://schemas.microsoft.com/office/drawing/2014/main" id="{B942CE85-C101-08ED-292D-15BC07B920FD}"/>
               </a:ext>
             </a:extLst>
           </p:cNvPr>
@@ -2357,7 +2357,7 @@
           <p:cNvPr id="5" name="Date Placeholder 4">
             <a:extLst>
               <a:ext uri="{FF2B5EF4-FFF2-40B4-BE49-F238E27FC236}">
-                <a16:creationId xmlns:a16="http://schemas.microsoft.com/office/drawing/2014/main" id="{6BE8E900-24F4-E1D7-1B92-BDB16E73E739}"/>
+                <a16:creationId xmlns:a16="http://schemas.microsoft.com/office/drawing/2014/main" id="{997D5FD5-42A5-5A15-9886-C5DC101091E0}"/>
               </a:ext>
             </a:extLst>
           </p:cNvPr>
@@ -2373,9 +2373,9 @@
           <a:bodyPr/>
           <a:lstStyle/>
           <a:p>
-            <a:fld id="{CBB687F7-C49A-4855-9FDE-8079232C240D}" type="datetimeFigureOut">
+            <a:fld id="{8640AB0A-39C8-4D5F-8DB0-2D5859300311}" type="datetimeFigureOut">
               <a:rPr lang="en-US" smtClean="0"/>
-              <a:t>2/21/2026</a:t>
+              <a:t>3/16/2026</a:t>
             </a:fld>
             <a:endParaRPr lang="en-US"/>
           </a:p>
@@ -2386,7 +2386,7 @@
           <p:cNvPr id="6" name="Footer Placeholder 5">
             <a:extLst>
               <a:ext uri="{FF2B5EF4-FFF2-40B4-BE49-F238E27FC236}">
-                <a16:creationId xmlns:a16="http://schemas.microsoft.com/office/drawing/2014/main" id="{25011BCF-4DB4-354B-63A3-B2F66116E9B1}"/>
+                <a16:creationId xmlns:a16="http://schemas.microsoft.com/office/drawing/2014/main" id="{7FB61333-7004-60B6-0A8C-06236ACC975D}"/>
               </a:ext>
             </a:extLst>
           </p:cNvPr>
@@ -2411,7 +2411,7 @@
           <p:cNvPr id="7" name="Slide Number Placeholder 6">
             <a:extLst>
               <a:ext uri="{FF2B5EF4-FFF2-40B4-BE49-F238E27FC236}">
-                <a16:creationId xmlns:a16="http://schemas.microsoft.com/office/drawing/2014/main" id="{E014A084-EC02-396E-741A-6D161FB5575B}"/>
+                <a16:creationId xmlns:a16="http://schemas.microsoft.com/office/drawing/2014/main" id="{58B9A1CB-3B06-CA94-6D93-C56A995F7872}"/>
               </a:ext>
             </a:extLst>
           </p:cNvPr>
@@ -2427,7 +2427,7 @@
           <a:bodyPr/>
           <a:lstStyle/>
           <a:p>
-            <a:fld id="{C67D69EA-156E-4BAB-A371-A4BF45380129}" type="slidenum">
+            <a:fld id="{9361F2F8-A3CD-4E9D-9B45-AA7ACC7DECEC}" type="slidenum">
               <a:rPr lang="en-US" smtClean="0"/>
               <a:t>‹#›</a:t>
             </a:fld>
@@ -2438,7 +2438,7 @@
     </p:spTree>
     <p:extLst>
       <p:ext uri="{BB962C8B-B14F-4D97-AF65-F5344CB8AC3E}">
-        <p14:creationId xmlns:p14="http://schemas.microsoft.com/office/powerpoint/2010/main" val="1862328162"/>
+        <p14:creationId xmlns:p14="http://schemas.microsoft.com/office/powerpoint/2010/main" val="3234175938"/>
       </p:ext>
     </p:extLst>
   </p:cSld>
@@ -2470,7 +2470,7 @@
           <p:cNvPr id="2" name="Title 1">
             <a:extLst>
               <a:ext uri="{FF2B5EF4-FFF2-40B4-BE49-F238E27FC236}">
-                <a16:creationId xmlns:a16="http://schemas.microsoft.com/office/drawing/2014/main" id="{12802F15-233D-FB6C-A6C3-A7B909E6EEED}"/>
+                <a16:creationId xmlns:a16="http://schemas.microsoft.com/office/drawing/2014/main" id="{FEFEDB6D-71E8-5403-2C0F-FA4BF9E3428B}"/>
               </a:ext>
             </a:extLst>
           </p:cNvPr>
@@ -2507,7 +2507,7 @@
           <p:cNvPr id="3" name="Picture Placeholder 2">
             <a:extLst>
               <a:ext uri="{FF2B5EF4-FFF2-40B4-BE49-F238E27FC236}">
-                <a16:creationId xmlns:a16="http://schemas.microsoft.com/office/drawing/2014/main" id="{C8019FB9-5E52-678F-7F3B-FACB372C7D0F}"/>
+                <a16:creationId xmlns:a16="http://schemas.microsoft.com/office/drawing/2014/main" id="{65E85BD3-B55E-0BE5-6575-0312F1C45CEE}"/>
               </a:ext>
             </a:extLst>
           </p:cNvPr>
@@ -2574,7 +2574,7 @@
           <p:cNvPr id="4" name="Text Placeholder 3">
             <a:extLst>
               <a:ext uri="{FF2B5EF4-FFF2-40B4-BE49-F238E27FC236}">
-                <a16:creationId xmlns:a16="http://schemas.microsoft.com/office/drawing/2014/main" id="{F1BFF9C5-886F-5861-72BB-3AE1A5866BD1}"/>
+                <a16:creationId xmlns:a16="http://schemas.microsoft.com/office/drawing/2014/main" id="{253403D0-7154-6EE8-46B5-325200E827F0}"/>
               </a:ext>
             </a:extLst>
           </p:cNvPr>
@@ -2645,7 +2645,7 @@
           <p:cNvPr id="5" name="Date Placeholder 4">
             <a:extLst>
               <a:ext uri="{FF2B5EF4-FFF2-40B4-BE49-F238E27FC236}">
-                <a16:creationId xmlns:a16="http://schemas.microsoft.com/office/drawing/2014/main" id="{798709F1-FFAB-A88F-7FD4-F7DE1DC677CA}"/>
+                <a16:creationId xmlns:a16="http://schemas.microsoft.com/office/drawing/2014/main" id="{408950E0-8F5D-1BDC-BB48-E39328177D05}"/>
               </a:ext>
             </a:extLst>
           </p:cNvPr>
@@ -2661,9 +2661,9 @@
           <a:bodyPr/>
           <a:lstStyle/>
           <a:p>
-            <a:fld id="{CBB687F7-C49A-4855-9FDE-8079232C240D}" type="datetimeFigureOut">
+            <a:fld id="{8640AB0A-39C8-4D5F-8DB0-2D5859300311}" type="datetimeFigureOut">
               <a:rPr lang="en-US" smtClean="0"/>
-              <a:t>2/21/2026</a:t>
+              <a:t>3/16/2026</a:t>
             </a:fld>
             <a:endParaRPr lang="en-US"/>
           </a:p>
@@ -2674,7 +2674,7 @@
           <p:cNvPr id="6" name="Footer Placeholder 5">
             <a:extLst>
               <a:ext uri="{FF2B5EF4-FFF2-40B4-BE49-F238E27FC236}">
-                <a16:creationId xmlns:a16="http://schemas.microsoft.com/office/drawing/2014/main" id="{4AF3CFB7-2551-F409-CD5E-253276AD7F32}"/>
+                <a16:creationId xmlns:a16="http://schemas.microsoft.com/office/drawing/2014/main" id="{C599CDD3-93E5-F4F1-B2AA-039A546CF609}"/>
               </a:ext>
             </a:extLst>
           </p:cNvPr>
@@ -2699,7 +2699,7 @@
           <p:cNvPr id="7" name="Slide Number Placeholder 6">
             <a:extLst>
               <a:ext uri="{FF2B5EF4-FFF2-40B4-BE49-F238E27FC236}">
-                <a16:creationId xmlns:a16="http://schemas.microsoft.com/office/drawing/2014/main" id="{72545289-3D83-A325-64F4-E15E8F491255}"/>
+                <a16:creationId xmlns:a16="http://schemas.microsoft.com/office/drawing/2014/main" id="{C009E0F4-3C0C-0BBC-B834-7FD6FFA56D53}"/>
               </a:ext>
             </a:extLst>
           </p:cNvPr>
@@ -2715,7 +2715,7 @@
           <a:bodyPr/>
           <a:lstStyle/>
           <a:p>
-            <a:fld id="{C67D69EA-156E-4BAB-A371-A4BF45380129}" type="slidenum">
+            <a:fld id="{9361F2F8-A3CD-4E9D-9B45-AA7ACC7DECEC}" type="slidenum">
               <a:rPr lang="en-US" smtClean="0"/>
               <a:t>‹#›</a:t>
             </a:fld>
@@ -2726,7 +2726,7 @@
     </p:spTree>
     <p:extLst>
       <p:ext uri="{BB962C8B-B14F-4D97-AF65-F5344CB8AC3E}">
-        <p14:creationId xmlns:p14="http://schemas.microsoft.com/office/powerpoint/2010/main" val="3622670129"/>
+        <p14:creationId xmlns:p14="http://schemas.microsoft.com/office/powerpoint/2010/main" val="4073812504"/>
       </p:ext>
     </p:extLst>
   </p:cSld>
@@ -2763,7 +2763,7 @@
           <p:cNvPr id="2" name="Title Placeholder 1">
             <a:extLst>
               <a:ext uri="{FF2B5EF4-FFF2-40B4-BE49-F238E27FC236}">
-                <a16:creationId xmlns:a16="http://schemas.microsoft.com/office/drawing/2014/main" id="{90E09D6D-59AA-5540-68D7-601397920462}"/>
+                <a16:creationId xmlns:a16="http://schemas.microsoft.com/office/drawing/2014/main" id="{3F5DEC63-B449-B8DB-0F5E-773093C4988E}"/>
               </a:ext>
             </a:extLst>
           </p:cNvPr>
@@ -2801,7 +2801,7 @@
           <p:cNvPr id="3" name="Text Placeholder 2">
             <a:extLst>
               <a:ext uri="{FF2B5EF4-FFF2-40B4-BE49-F238E27FC236}">
-                <a16:creationId xmlns:a16="http://schemas.microsoft.com/office/drawing/2014/main" id="{E5A51964-5F89-403C-1B10-847793327EEE}"/>
+                <a16:creationId xmlns:a16="http://schemas.microsoft.com/office/drawing/2014/main" id="{F031EAD2-0822-ACF3-E7A9-D6D8034CC3FE}"/>
               </a:ext>
             </a:extLst>
           </p:cNvPr>
@@ -2868,7 +2868,7 @@
           <p:cNvPr id="4" name="Date Placeholder 3">
             <a:extLst>
               <a:ext uri="{FF2B5EF4-FFF2-40B4-BE49-F238E27FC236}">
-                <a16:creationId xmlns:a16="http://schemas.microsoft.com/office/drawing/2014/main" id="{D483A0F9-7A61-D119-EF5F-DB4F94B35ACA}"/>
+                <a16:creationId xmlns:a16="http://schemas.microsoft.com/office/drawing/2014/main" id="{B6763C2E-16FE-096C-E57F-4DB8DE328982}"/>
               </a:ext>
             </a:extLst>
           </p:cNvPr>
@@ -2902,9 +2902,9 @@
             </a:lvl1pPr>
           </a:lstStyle>
           <a:p>
-            <a:fld id="{CBB687F7-C49A-4855-9FDE-8079232C240D}" type="datetimeFigureOut">
+            <a:fld id="{8640AB0A-39C8-4D5F-8DB0-2D5859300311}" type="datetimeFigureOut">
               <a:rPr lang="en-US" smtClean="0"/>
-              <a:t>2/21/2026</a:t>
+              <a:t>3/16/2026</a:t>
             </a:fld>
             <a:endParaRPr lang="en-US"/>
           </a:p>
@@ -2915,7 +2915,7 @@
           <p:cNvPr id="5" name="Footer Placeholder 4">
             <a:extLst>
               <a:ext uri="{FF2B5EF4-FFF2-40B4-BE49-F238E27FC236}">
-                <a16:creationId xmlns:a16="http://schemas.microsoft.com/office/drawing/2014/main" id="{E19652B1-554D-D95B-C2D1-6356A84FAEFB}"/>
+                <a16:creationId xmlns:a16="http://schemas.microsoft.com/office/drawing/2014/main" id="{FE3EF6D6-1042-DA1A-0CDA-78ADE14ACDA0}"/>
               </a:ext>
             </a:extLst>
           </p:cNvPr>
@@ -2958,7 +2958,7 @@
           <p:cNvPr id="6" name="Slide Number Placeholder 5">
             <a:extLst>
               <a:ext uri="{FF2B5EF4-FFF2-40B4-BE49-F238E27FC236}">
-                <a16:creationId xmlns:a16="http://schemas.microsoft.com/office/drawing/2014/main" id="{6AA2967D-E2A0-07F8-6FB1-C0592A97A0B3}"/>
+                <a16:creationId xmlns:a16="http://schemas.microsoft.com/office/drawing/2014/main" id="{4F9A853E-11E9-EB42-7952-90179B5D1ACF}"/>
               </a:ext>
             </a:extLst>
           </p:cNvPr>
@@ -2992,7 +2992,7 @@
             </a:lvl1pPr>
           </a:lstStyle>
           <a:p>
-            <a:fld id="{C67D69EA-156E-4BAB-A371-A4BF45380129}" type="slidenum">
+            <a:fld id="{9361F2F8-A3CD-4E9D-9B45-AA7ACC7DECEC}" type="slidenum">
               <a:rPr lang="en-US" smtClean="0"/>
               <a:t>‹#›</a:t>
             </a:fld>
@@ -3003,7 +3003,7 @@
     </p:spTree>
     <p:extLst>
       <p:ext uri="{BB962C8B-B14F-4D97-AF65-F5344CB8AC3E}">
-        <p14:creationId xmlns:p14="http://schemas.microsoft.com/office/powerpoint/2010/main" val="954951235"/>
+        <p14:creationId xmlns:p14="http://schemas.microsoft.com/office/powerpoint/2010/main" val="3789377524"/>
       </p:ext>
     </p:extLst>
   </p:cSld>
@@ -3326,7 +3326,7 @@
           <p:cNvPr id="2" name="Title 1">
             <a:extLst>
               <a:ext uri="{FF2B5EF4-FFF2-40B4-BE49-F238E27FC236}">
-                <a16:creationId xmlns:a16="http://schemas.microsoft.com/office/drawing/2014/main" id="{D812382F-8E36-A04A-155D-9590C6633B07}"/>
+                <a16:creationId xmlns:a16="http://schemas.microsoft.com/office/drawing/2014/main" id="{55CC4000-CBDD-A192-427B-FCB8C93E92D5}"/>
               </a:ext>
             </a:extLst>
           </p:cNvPr>
@@ -3354,7 +3354,7 @@
           <p:cNvPr id="3" name="Content Placeholder 2">
             <a:extLst>
               <a:ext uri="{FF2B5EF4-FFF2-40B4-BE49-F238E27FC236}">
-                <a16:creationId xmlns:a16="http://schemas.microsoft.com/office/drawing/2014/main" id="{EB5B1E36-2675-AD57-24D5-E4FD9CE81231}"/>
+                <a16:creationId xmlns:a16="http://schemas.microsoft.com/office/drawing/2014/main" id="{74061AC4-A4DD-F994-A440-CFFD6F523762}"/>
               </a:ext>
             </a:extLst>
           </p:cNvPr>
@@ -3377,7 +3377,7 @@
     </p:spTree>
     <p:extLst>
       <p:ext uri="{BB962C8B-B14F-4D97-AF65-F5344CB8AC3E}">
-        <p14:creationId xmlns:p14="http://schemas.microsoft.com/office/powerpoint/2010/main" val="3163242225"/>
+        <p14:creationId xmlns:p14="http://schemas.microsoft.com/office/powerpoint/2010/main" val="4009141093"/>
       </p:ext>
     </p:extLst>
   </p:cSld>

--- a/samples/test_pptx.pptx
+++ b/samples/test_pptx.pptx
@@ -129,7 +129,7 @@
           <p:cNvPr id="2" name="Title 1">
             <a:extLst>
               <a:ext uri="{FF2B5EF4-FFF2-40B4-BE49-F238E27FC236}">
-                <a16:creationId xmlns:a16="http://schemas.microsoft.com/office/drawing/2014/main" id="{90C61838-42E6-69A1-DFD1-FEC2527F65E5}"/>
+                <a16:creationId xmlns:a16="http://schemas.microsoft.com/office/drawing/2014/main" id="{F3980D6E-55D1-1FBC-282C-39128E0FA95F}"/>
               </a:ext>
             </a:extLst>
           </p:cNvPr>
@@ -166,7 +166,7 @@
           <p:cNvPr id="3" name="Subtitle 2">
             <a:extLst>
               <a:ext uri="{FF2B5EF4-FFF2-40B4-BE49-F238E27FC236}">
-                <a16:creationId xmlns:a16="http://schemas.microsoft.com/office/drawing/2014/main" id="{2BAFF06F-FBB2-42B2-1977-05170536AC1B}"/>
+                <a16:creationId xmlns:a16="http://schemas.microsoft.com/office/drawing/2014/main" id="{DEA0689B-8E5A-ADB2-445E-9E95E7C4908C}"/>
               </a:ext>
             </a:extLst>
           </p:cNvPr>
@@ -236,7 +236,7 @@
           <p:cNvPr id="4" name="Date Placeholder 3">
             <a:extLst>
               <a:ext uri="{FF2B5EF4-FFF2-40B4-BE49-F238E27FC236}">
-                <a16:creationId xmlns:a16="http://schemas.microsoft.com/office/drawing/2014/main" id="{F6AB109C-9208-18A6-FCD0-FF2A1C3F0E22}"/>
+                <a16:creationId xmlns:a16="http://schemas.microsoft.com/office/drawing/2014/main" id="{B6EF1E9F-B3FD-F418-13CE-4FE22F9A2CDD}"/>
               </a:ext>
             </a:extLst>
           </p:cNvPr>
@@ -252,9 +252,9 @@
           <a:bodyPr/>
           <a:lstStyle/>
           <a:p>
-            <a:fld id="{8640AB0A-39C8-4D5F-8DB0-2D5859300311}" type="datetimeFigureOut">
+            <a:fld id="{3DE2E1D5-A90B-45F4-80DF-D7994070D3D2}" type="datetimeFigureOut">
               <a:rPr lang="en-US" smtClean="0"/>
-              <a:t>3/16/2026</a:t>
+              <a:t>7/18/2022</a:t>
             </a:fld>
             <a:endParaRPr lang="en-US"/>
           </a:p>
@@ -265,7 +265,7 @@
           <p:cNvPr id="5" name="Footer Placeholder 4">
             <a:extLst>
               <a:ext uri="{FF2B5EF4-FFF2-40B4-BE49-F238E27FC236}">
-                <a16:creationId xmlns:a16="http://schemas.microsoft.com/office/drawing/2014/main" id="{2705124A-0B16-5220-01FB-A2858F1D7A42}"/>
+                <a16:creationId xmlns:a16="http://schemas.microsoft.com/office/drawing/2014/main" id="{3FE08529-9C72-EEBD-8C7C-21FB8C22C853}"/>
               </a:ext>
             </a:extLst>
           </p:cNvPr>
@@ -290,7 +290,7 @@
           <p:cNvPr id="6" name="Slide Number Placeholder 5">
             <a:extLst>
               <a:ext uri="{FF2B5EF4-FFF2-40B4-BE49-F238E27FC236}">
-                <a16:creationId xmlns:a16="http://schemas.microsoft.com/office/drawing/2014/main" id="{53E1BE64-7D32-3A64-6D16-B69D75C4C157}"/>
+                <a16:creationId xmlns:a16="http://schemas.microsoft.com/office/drawing/2014/main" id="{382700DE-907A-2557-BDC3-15521A9B6A6C}"/>
               </a:ext>
             </a:extLst>
           </p:cNvPr>
@@ -306,7 +306,7 @@
           <a:bodyPr/>
           <a:lstStyle/>
           <a:p>
-            <a:fld id="{9361F2F8-A3CD-4E9D-9B45-AA7ACC7DECEC}" type="slidenum">
+            <a:fld id="{3E73AC30-073E-4CD1-993C-6630E79B55A9}" type="slidenum">
               <a:rPr lang="en-US" smtClean="0"/>
               <a:t>‹#›</a:t>
             </a:fld>
@@ -317,7 +317,7 @@
     </p:spTree>
     <p:extLst>
       <p:ext uri="{BB962C8B-B14F-4D97-AF65-F5344CB8AC3E}">
-        <p14:creationId xmlns:p14="http://schemas.microsoft.com/office/powerpoint/2010/main" val="3420887599"/>
+        <p14:creationId xmlns:p14="http://schemas.microsoft.com/office/powerpoint/2010/main" val="1115451144"/>
       </p:ext>
     </p:extLst>
   </p:cSld>
@@ -349,7 +349,7 @@
           <p:cNvPr id="2" name="Title 1">
             <a:extLst>
               <a:ext uri="{FF2B5EF4-FFF2-40B4-BE49-F238E27FC236}">
-                <a16:creationId xmlns:a16="http://schemas.microsoft.com/office/drawing/2014/main" id="{17EED93A-230D-1AAF-2515-1B0E14B3C633}"/>
+                <a16:creationId xmlns:a16="http://schemas.microsoft.com/office/drawing/2014/main" id="{C3977873-E4C6-4E47-1AEB-F6031484D702}"/>
               </a:ext>
             </a:extLst>
           </p:cNvPr>
@@ -377,7 +377,7 @@
           <p:cNvPr id="3" name="Vertical Text Placeholder 2">
             <a:extLst>
               <a:ext uri="{FF2B5EF4-FFF2-40B4-BE49-F238E27FC236}">
-                <a16:creationId xmlns:a16="http://schemas.microsoft.com/office/drawing/2014/main" id="{A21DFA35-DF1C-BFBF-9896-A8BB73D4D676}"/>
+                <a16:creationId xmlns:a16="http://schemas.microsoft.com/office/drawing/2014/main" id="{BB4CC56F-850F-65B8-9947-8A9E83551EC4}"/>
               </a:ext>
             </a:extLst>
           </p:cNvPr>
@@ -434,7 +434,7 @@
           <p:cNvPr id="4" name="Date Placeholder 3">
             <a:extLst>
               <a:ext uri="{FF2B5EF4-FFF2-40B4-BE49-F238E27FC236}">
-                <a16:creationId xmlns:a16="http://schemas.microsoft.com/office/drawing/2014/main" id="{0AAFC8B6-CC01-CC6C-78DA-07E4A621CEC1}"/>
+                <a16:creationId xmlns:a16="http://schemas.microsoft.com/office/drawing/2014/main" id="{981C69D7-7385-DD5F-7A81-098C04C416E4}"/>
               </a:ext>
             </a:extLst>
           </p:cNvPr>
@@ -450,9 +450,9 @@
           <a:bodyPr/>
           <a:lstStyle/>
           <a:p>
-            <a:fld id="{8640AB0A-39C8-4D5F-8DB0-2D5859300311}" type="datetimeFigureOut">
+            <a:fld id="{3DE2E1D5-A90B-45F4-80DF-D7994070D3D2}" type="datetimeFigureOut">
               <a:rPr lang="en-US" smtClean="0"/>
-              <a:t>3/16/2026</a:t>
+              <a:t>7/18/2022</a:t>
             </a:fld>
             <a:endParaRPr lang="en-US"/>
           </a:p>
@@ -463,7 +463,7 @@
           <p:cNvPr id="5" name="Footer Placeholder 4">
             <a:extLst>
               <a:ext uri="{FF2B5EF4-FFF2-40B4-BE49-F238E27FC236}">
-                <a16:creationId xmlns:a16="http://schemas.microsoft.com/office/drawing/2014/main" id="{C95B5967-911C-01B1-D194-0804B2AAF388}"/>
+                <a16:creationId xmlns:a16="http://schemas.microsoft.com/office/drawing/2014/main" id="{E238F51D-50AF-DC43-F818-6D859A807C28}"/>
               </a:ext>
             </a:extLst>
           </p:cNvPr>
@@ -488,7 +488,7 @@
           <p:cNvPr id="6" name="Slide Number Placeholder 5">
             <a:extLst>
               <a:ext uri="{FF2B5EF4-FFF2-40B4-BE49-F238E27FC236}">
-                <a16:creationId xmlns:a16="http://schemas.microsoft.com/office/drawing/2014/main" id="{71A82601-796D-0C16-F181-74F21C4215F1}"/>
+                <a16:creationId xmlns:a16="http://schemas.microsoft.com/office/drawing/2014/main" id="{8BFC852E-0CC5-DB11-A9EF-CC5197FD564F}"/>
               </a:ext>
             </a:extLst>
           </p:cNvPr>
@@ -504,7 +504,7 @@
           <a:bodyPr/>
           <a:lstStyle/>
           <a:p>
-            <a:fld id="{9361F2F8-A3CD-4E9D-9B45-AA7ACC7DECEC}" type="slidenum">
+            <a:fld id="{3E73AC30-073E-4CD1-993C-6630E79B55A9}" type="slidenum">
               <a:rPr lang="en-US" smtClean="0"/>
               <a:t>‹#›</a:t>
             </a:fld>
@@ -515,7 +515,7 @@
     </p:spTree>
     <p:extLst>
       <p:ext uri="{BB962C8B-B14F-4D97-AF65-F5344CB8AC3E}">
-        <p14:creationId xmlns:p14="http://schemas.microsoft.com/office/powerpoint/2010/main" val="4086877408"/>
+        <p14:creationId xmlns:p14="http://schemas.microsoft.com/office/powerpoint/2010/main" val="177187198"/>
       </p:ext>
     </p:extLst>
   </p:cSld>
@@ -547,7 +547,7 @@
           <p:cNvPr id="2" name="Vertical Title 1">
             <a:extLst>
               <a:ext uri="{FF2B5EF4-FFF2-40B4-BE49-F238E27FC236}">
-                <a16:creationId xmlns:a16="http://schemas.microsoft.com/office/drawing/2014/main" id="{166B2BDC-4A15-8113-0F45-4090971D714E}"/>
+                <a16:creationId xmlns:a16="http://schemas.microsoft.com/office/drawing/2014/main" id="{79AD5E47-0165-1AD5-80BF-E47EC25343D8}"/>
               </a:ext>
             </a:extLst>
           </p:cNvPr>
@@ -580,7 +580,7 @@
           <p:cNvPr id="3" name="Vertical Text Placeholder 2">
             <a:extLst>
               <a:ext uri="{FF2B5EF4-FFF2-40B4-BE49-F238E27FC236}">
-                <a16:creationId xmlns:a16="http://schemas.microsoft.com/office/drawing/2014/main" id="{A610259D-EA48-58BA-2D49-3F6695041B69}"/>
+                <a16:creationId xmlns:a16="http://schemas.microsoft.com/office/drawing/2014/main" id="{87D55867-F6FF-0D76-3291-B229103FC16E}"/>
               </a:ext>
             </a:extLst>
           </p:cNvPr>
@@ -642,7 +642,7 @@
           <p:cNvPr id="4" name="Date Placeholder 3">
             <a:extLst>
               <a:ext uri="{FF2B5EF4-FFF2-40B4-BE49-F238E27FC236}">
-                <a16:creationId xmlns:a16="http://schemas.microsoft.com/office/drawing/2014/main" id="{5CA55CC3-2A48-B4B0-2C17-E3C376B09FE9}"/>
+                <a16:creationId xmlns:a16="http://schemas.microsoft.com/office/drawing/2014/main" id="{778AE0BD-0A51-A2FE-EC6E-DA6941DA2A48}"/>
               </a:ext>
             </a:extLst>
           </p:cNvPr>
@@ -658,9 +658,9 @@
           <a:bodyPr/>
           <a:lstStyle/>
           <a:p>
-            <a:fld id="{8640AB0A-39C8-4D5F-8DB0-2D5859300311}" type="datetimeFigureOut">
+            <a:fld id="{3DE2E1D5-A90B-45F4-80DF-D7994070D3D2}" type="datetimeFigureOut">
               <a:rPr lang="en-US" smtClean="0"/>
-              <a:t>3/16/2026</a:t>
+              <a:t>7/18/2022</a:t>
             </a:fld>
             <a:endParaRPr lang="en-US"/>
           </a:p>
@@ -671,7 +671,7 @@
           <p:cNvPr id="5" name="Footer Placeholder 4">
             <a:extLst>
               <a:ext uri="{FF2B5EF4-FFF2-40B4-BE49-F238E27FC236}">
-                <a16:creationId xmlns:a16="http://schemas.microsoft.com/office/drawing/2014/main" id="{987956FB-D43B-9254-D84F-D5F259992FEB}"/>
+                <a16:creationId xmlns:a16="http://schemas.microsoft.com/office/drawing/2014/main" id="{70098DBC-FBD9-2FB7-31E4-416A3828EB6E}"/>
               </a:ext>
             </a:extLst>
           </p:cNvPr>
@@ -696,7 +696,7 @@
           <p:cNvPr id="6" name="Slide Number Placeholder 5">
             <a:extLst>
               <a:ext uri="{FF2B5EF4-FFF2-40B4-BE49-F238E27FC236}">
-                <a16:creationId xmlns:a16="http://schemas.microsoft.com/office/drawing/2014/main" id="{6B53F844-8DA3-E580-945B-B0818B2E4EFA}"/>
+                <a16:creationId xmlns:a16="http://schemas.microsoft.com/office/drawing/2014/main" id="{77C1200D-2D58-0DE0-A9DB-A1C6F13EFCE7}"/>
               </a:ext>
             </a:extLst>
           </p:cNvPr>
@@ -712,7 +712,7 @@
           <a:bodyPr/>
           <a:lstStyle/>
           <a:p>
-            <a:fld id="{9361F2F8-A3CD-4E9D-9B45-AA7ACC7DECEC}" type="slidenum">
+            <a:fld id="{3E73AC30-073E-4CD1-993C-6630E79B55A9}" type="slidenum">
               <a:rPr lang="en-US" smtClean="0"/>
               <a:t>‹#›</a:t>
             </a:fld>
@@ -723,7 +723,7 @@
     </p:spTree>
     <p:extLst>
       <p:ext uri="{BB962C8B-B14F-4D97-AF65-F5344CB8AC3E}">
-        <p14:creationId xmlns:p14="http://schemas.microsoft.com/office/powerpoint/2010/main" val="2870412579"/>
+        <p14:creationId xmlns:p14="http://schemas.microsoft.com/office/powerpoint/2010/main" val="3397545774"/>
       </p:ext>
     </p:extLst>
   </p:cSld>
@@ -755,7 +755,7 @@
           <p:cNvPr id="2" name="Title 1">
             <a:extLst>
               <a:ext uri="{FF2B5EF4-FFF2-40B4-BE49-F238E27FC236}">
-                <a16:creationId xmlns:a16="http://schemas.microsoft.com/office/drawing/2014/main" id="{E0CFC717-6322-CF80-326C-8A29B171CF82}"/>
+                <a16:creationId xmlns:a16="http://schemas.microsoft.com/office/drawing/2014/main" id="{C661A189-2D1F-AA3F-C090-BA34303C230E}"/>
               </a:ext>
             </a:extLst>
           </p:cNvPr>
@@ -783,7 +783,7 @@
           <p:cNvPr id="3" name="Content Placeholder 2">
             <a:extLst>
               <a:ext uri="{FF2B5EF4-FFF2-40B4-BE49-F238E27FC236}">
-                <a16:creationId xmlns:a16="http://schemas.microsoft.com/office/drawing/2014/main" id="{C7736629-BB67-D845-6158-A336B5C21BCF}"/>
+                <a16:creationId xmlns:a16="http://schemas.microsoft.com/office/drawing/2014/main" id="{81823D4C-0DD9-DFEC-4859-8664C266C2EE}"/>
               </a:ext>
             </a:extLst>
           </p:cNvPr>
@@ -840,7 +840,7 @@
           <p:cNvPr id="4" name="Date Placeholder 3">
             <a:extLst>
               <a:ext uri="{FF2B5EF4-FFF2-40B4-BE49-F238E27FC236}">
-                <a16:creationId xmlns:a16="http://schemas.microsoft.com/office/drawing/2014/main" id="{095813D6-F6CC-C9AD-EF98-8906F515F92D}"/>
+                <a16:creationId xmlns:a16="http://schemas.microsoft.com/office/drawing/2014/main" id="{AB4C56E4-4CB1-FF33-1584-A83FC202C0CE}"/>
               </a:ext>
             </a:extLst>
           </p:cNvPr>
@@ -856,9 +856,9 @@
           <a:bodyPr/>
           <a:lstStyle/>
           <a:p>
-            <a:fld id="{8640AB0A-39C8-4D5F-8DB0-2D5859300311}" type="datetimeFigureOut">
+            <a:fld id="{3DE2E1D5-A90B-45F4-80DF-D7994070D3D2}" type="datetimeFigureOut">
               <a:rPr lang="en-US" smtClean="0"/>
-              <a:t>3/16/2026</a:t>
+              <a:t>7/18/2022</a:t>
             </a:fld>
             <a:endParaRPr lang="en-US"/>
           </a:p>
@@ -869,7 +869,7 @@
           <p:cNvPr id="5" name="Footer Placeholder 4">
             <a:extLst>
               <a:ext uri="{FF2B5EF4-FFF2-40B4-BE49-F238E27FC236}">
-                <a16:creationId xmlns:a16="http://schemas.microsoft.com/office/drawing/2014/main" id="{5D35A646-6C84-4575-F859-5242E07AB8C7}"/>
+                <a16:creationId xmlns:a16="http://schemas.microsoft.com/office/drawing/2014/main" id="{DF1D7D53-CC7F-BE87-F0F5-C4A385BC0206}"/>
               </a:ext>
             </a:extLst>
           </p:cNvPr>
@@ -894,7 +894,7 @@
           <p:cNvPr id="6" name="Slide Number Placeholder 5">
             <a:extLst>
               <a:ext uri="{FF2B5EF4-FFF2-40B4-BE49-F238E27FC236}">
-                <a16:creationId xmlns:a16="http://schemas.microsoft.com/office/drawing/2014/main" id="{8E92DDB4-5343-1871-CBA5-715BBEFF5160}"/>
+                <a16:creationId xmlns:a16="http://schemas.microsoft.com/office/drawing/2014/main" id="{9208C9BF-5F9E-C89C-5973-EC13237BD871}"/>
               </a:ext>
             </a:extLst>
           </p:cNvPr>
@@ -910,7 +910,7 @@
           <a:bodyPr/>
           <a:lstStyle/>
           <a:p>
-            <a:fld id="{9361F2F8-A3CD-4E9D-9B45-AA7ACC7DECEC}" type="slidenum">
+            <a:fld id="{3E73AC30-073E-4CD1-993C-6630E79B55A9}" type="slidenum">
               <a:rPr lang="en-US" smtClean="0"/>
               <a:t>‹#›</a:t>
             </a:fld>
@@ -921,7 +921,7 @@
     </p:spTree>
     <p:extLst>
       <p:ext uri="{BB962C8B-B14F-4D97-AF65-F5344CB8AC3E}">
-        <p14:creationId xmlns:p14="http://schemas.microsoft.com/office/powerpoint/2010/main" val="3282230454"/>
+        <p14:creationId xmlns:p14="http://schemas.microsoft.com/office/powerpoint/2010/main" val="1551911237"/>
       </p:ext>
     </p:extLst>
   </p:cSld>
@@ -953,7 +953,7 @@
           <p:cNvPr id="2" name="Title 1">
             <a:extLst>
               <a:ext uri="{FF2B5EF4-FFF2-40B4-BE49-F238E27FC236}">
-                <a16:creationId xmlns:a16="http://schemas.microsoft.com/office/drawing/2014/main" id="{EBC5CC28-BF9D-63BF-9FCF-9524195925E4}"/>
+                <a16:creationId xmlns:a16="http://schemas.microsoft.com/office/drawing/2014/main" id="{D5248114-ED25-49F3-711F-B1C95A1C7876}"/>
               </a:ext>
             </a:extLst>
           </p:cNvPr>
@@ -990,7 +990,7 @@
           <p:cNvPr id="3" name="Text Placeholder 2">
             <a:extLst>
               <a:ext uri="{FF2B5EF4-FFF2-40B4-BE49-F238E27FC236}">
-                <a16:creationId xmlns:a16="http://schemas.microsoft.com/office/drawing/2014/main" id="{A901E8C3-ABBB-9A87-827F-482BAE268913}"/>
+                <a16:creationId xmlns:a16="http://schemas.microsoft.com/office/drawing/2014/main" id="{E5E7FACC-2928-FA50-E74D-482FF7B63660}"/>
               </a:ext>
             </a:extLst>
           </p:cNvPr>
@@ -1015,7 +1015,7 @@
               <a:defRPr sz="2400">
                 <a:solidFill>
                   <a:schemeClr val="tx1">
-                    <a:tint val="82000"/>
+                    <a:tint val="75000"/>
                   </a:schemeClr>
                 </a:solidFill>
               </a:defRPr>
@@ -1025,7 +1025,7 @@
               <a:defRPr sz="2000">
                 <a:solidFill>
                   <a:schemeClr val="tx1">
-                    <a:tint val="82000"/>
+                    <a:tint val="75000"/>
                   </a:schemeClr>
                 </a:solidFill>
               </a:defRPr>
@@ -1035,7 +1035,7 @@
               <a:defRPr sz="1800">
                 <a:solidFill>
                   <a:schemeClr val="tx1">
-                    <a:tint val="82000"/>
+                    <a:tint val="75000"/>
                   </a:schemeClr>
                 </a:solidFill>
               </a:defRPr>
@@ -1045,7 +1045,7 @@
               <a:defRPr sz="1600">
                 <a:solidFill>
                   <a:schemeClr val="tx1">
-                    <a:tint val="82000"/>
+                    <a:tint val="75000"/>
                   </a:schemeClr>
                 </a:solidFill>
               </a:defRPr>
@@ -1055,7 +1055,7 @@
               <a:defRPr sz="1600">
                 <a:solidFill>
                   <a:schemeClr val="tx1">
-                    <a:tint val="82000"/>
+                    <a:tint val="75000"/>
                   </a:schemeClr>
                 </a:solidFill>
               </a:defRPr>
@@ -1065,7 +1065,7 @@
               <a:defRPr sz="1600">
                 <a:solidFill>
                   <a:schemeClr val="tx1">
-                    <a:tint val="82000"/>
+                    <a:tint val="75000"/>
                   </a:schemeClr>
                 </a:solidFill>
               </a:defRPr>
@@ -1075,7 +1075,7 @@
               <a:defRPr sz="1600">
                 <a:solidFill>
                   <a:schemeClr val="tx1">
-                    <a:tint val="82000"/>
+                    <a:tint val="75000"/>
                   </a:schemeClr>
                 </a:solidFill>
               </a:defRPr>
@@ -1085,7 +1085,7 @@
               <a:defRPr sz="1600">
                 <a:solidFill>
                   <a:schemeClr val="tx1">
-                    <a:tint val="82000"/>
+                    <a:tint val="75000"/>
                   </a:schemeClr>
                 </a:solidFill>
               </a:defRPr>
@@ -1095,7 +1095,7 @@
               <a:defRPr sz="1600">
                 <a:solidFill>
                   <a:schemeClr val="tx1">
-                    <a:tint val="82000"/>
+                    <a:tint val="75000"/>
                   </a:schemeClr>
                 </a:solidFill>
               </a:defRPr>
@@ -1115,7 +1115,7 @@
           <p:cNvPr id="4" name="Date Placeholder 3">
             <a:extLst>
               <a:ext uri="{FF2B5EF4-FFF2-40B4-BE49-F238E27FC236}">
-                <a16:creationId xmlns:a16="http://schemas.microsoft.com/office/drawing/2014/main" id="{2FA19CA2-5FAF-1498-CED5-3B2B89F4D22E}"/>
+                <a16:creationId xmlns:a16="http://schemas.microsoft.com/office/drawing/2014/main" id="{BA5B3DF7-1536-155E-4D9B-FBE3FBF6FF04}"/>
               </a:ext>
             </a:extLst>
           </p:cNvPr>
@@ -1131,9 +1131,9 @@
           <a:bodyPr/>
           <a:lstStyle/>
           <a:p>
-            <a:fld id="{8640AB0A-39C8-4D5F-8DB0-2D5859300311}" type="datetimeFigureOut">
+            <a:fld id="{3DE2E1D5-A90B-45F4-80DF-D7994070D3D2}" type="datetimeFigureOut">
               <a:rPr lang="en-US" smtClean="0"/>
-              <a:t>3/16/2026</a:t>
+              <a:t>7/18/2022</a:t>
             </a:fld>
             <a:endParaRPr lang="en-US"/>
           </a:p>
@@ -1144,7 +1144,7 @@
           <p:cNvPr id="5" name="Footer Placeholder 4">
             <a:extLst>
               <a:ext uri="{FF2B5EF4-FFF2-40B4-BE49-F238E27FC236}">
-                <a16:creationId xmlns:a16="http://schemas.microsoft.com/office/drawing/2014/main" id="{F5B42823-DE81-87BF-1F42-0A971240F371}"/>
+                <a16:creationId xmlns:a16="http://schemas.microsoft.com/office/drawing/2014/main" id="{6641858A-8972-A1C3-E957-69F62CBCE800}"/>
               </a:ext>
             </a:extLst>
           </p:cNvPr>
@@ -1169,7 +1169,7 @@
           <p:cNvPr id="6" name="Slide Number Placeholder 5">
             <a:extLst>
               <a:ext uri="{FF2B5EF4-FFF2-40B4-BE49-F238E27FC236}">
-                <a16:creationId xmlns:a16="http://schemas.microsoft.com/office/drawing/2014/main" id="{394C6665-DA37-B035-A9D3-F8B874D366A0}"/>
+                <a16:creationId xmlns:a16="http://schemas.microsoft.com/office/drawing/2014/main" id="{A88E9589-120F-17D4-96C1-69666576FB06}"/>
               </a:ext>
             </a:extLst>
           </p:cNvPr>
@@ -1185,7 +1185,7 @@
           <a:bodyPr/>
           <a:lstStyle/>
           <a:p>
-            <a:fld id="{9361F2F8-A3CD-4E9D-9B45-AA7ACC7DECEC}" type="slidenum">
+            <a:fld id="{3E73AC30-073E-4CD1-993C-6630E79B55A9}" type="slidenum">
               <a:rPr lang="en-US" smtClean="0"/>
               <a:t>‹#›</a:t>
             </a:fld>
@@ -1196,7 +1196,7 @@
     </p:spTree>
     <p:extLst>
       <p:ext uri="{BB962C8B-B14F-4D97-AF65-F5344CB8AC3E}">
-        <p14:creationId xmlns:p14="http://schemas.microsoft.com/office/powerpoint/2010/main" val="2261606617"/>
+        <p14:creationId xmlns:p14="http://schemas.microsoft.com/office/powerpoint/2010/main" val="562124950"/>
       </p:ext>
     </p:extLst>
   </p:cSld>
@@ -1228,7 +1228,7 @@
           <p:cNvPr id="2" name="Title 1">
             <a:extLst>
               <a:ext uri="{FF2B5EF4-FFF2-40B4-BE49-F238E27FC236}">
-                <a16:creationId xmlns:a16="http://schemas.microsoft.com/office/drawing/2014/main" id="{9963EFD0-28B4-B972-152C-A486D60EFFB3}"/>
+                <a16:creationId xmlns:a16="http://schemas.microsoft.com/office/drawing/2014/main" id="{209A759D-A234-D1D7-5B75-4D4AEB4654DC}"/>
               </a:ext>
             </a:extLst>
           </p:cNvPr>
@@ -1256,7 +1256,7 @@
           <p:cNvPr id="3" name="Content Placeholder 2">
             <a:extLst>
               <a:ext uri="{FF2B5EF4-FFF2-40B4-BE49-F238E27FC236}">
-                <a16:creationId xmlns:a16="http://schemas.microsoft.com/office/drawing/2014/main" id="{24F7880F-F514-4588-13CD-402FA909AAED}"/>
+                <a16:creationId xmlns:a16="http://schemas.microsoft.com/office/drawing/2014/main" id="{65823591-7564-24E5-CDFF-EB7A2AAB6078}"/>
               </a:ext>
             </a:extLst>
           </p:cNvPr>
@@ -1318,7 +1318,7 @@
           <p:cNvPr id="4" name="Content Placeholder 3">
             <a:extLst>
               <a:ext uri="{FF2B5EF4-FFF2-40B4-BE49-F238E27FC236}">
-                <a16:creationId xmlns:a16="http://schemas.microsoft.com/office/drawing/2014/main" id="{04890AEC-F639-7CB3-9DE0-F904279E69A1}"/>
+                <a16:creationId xmlns:a16="http://schemas.microsoft.com/office/drawing/2014/main" id="{B7FC8609-221E-05AE-6D3B-1E82C6999D77}"/>
               </a:ext>
             </a:extLst>
           </p:cNvPr>
@@ -1380,7 +1380,7 @@
           <p:cNvPr id="5" name="Date Placeholder 4">
             <a:extLst>
               <a:ext uri="{FF2B5EF4-FFF2-40B4-BE49-F238E27FC236}">
-                <a16:creationId xmlns:a16="http://schemas.microsoft.com/office/drawing/2014/main" id="{59017B0C-2339-9271-64B9-C3D9E1C33977}"/>
+                <a16:creationId xmlns:a16="http://schemas.microsoft.com/office/drawing/2014/main" id="{7E26AAAE-C4A4-BA74-4AC7-BE771CA762CF}"/>
               </a:ext>
             </a:extLst>
           </p:cNvPr>
@@ -1396,9 +1396,9 @@
           <a:bodyPr/>
           <a:lstStyle/>
           <a:p>
-            <a:fld id="{8640AB0A-39C8-4D5F-8DB0-2D5859300311}" type="datetimeFigureOut">
+            <a:fld id="{3DE2E1D5-A90B-45F4-80DF-D7994070D3D2}" type="datetimeFigureOut">
               <a:rPr lang="en-US" smtClean="0"/>
-              <a:t>3/16/2026</a:t>
+              <a:t>7/18/2022</a:t>
             </a:fld>
             <a:endParaRPr lang="en-US"/>
           </a:p>
@@ -1409,7 +1409,7 @@
           <p:cNvPr id="6" name="Footer Placeholder 5">
             <a:extLst>
               <a:ext uri="{FF2B5EF4-FFF2-40B4-BE49-F238E27FC236}">
-                <a16:creationId xmlns:a16="http://schemas.microsoft.com/office/drawing/2014/main" id="{150DF103-51DE-2867-8BCE-EB5B7BA92B8B}"/>
+                <a16:creationId xmlns:a16="http://schemas.microsoft.com/office/drawing/2014/main" id="{B8D9803D-A039-CCD2-0CF4-E1D5ED794ED9}"/>
               </a:ext>
             </a:extLst>
           </p:cNvPr>
@@ -1434,7 +1434,7 @@
           <p:cNvPr id="7" name="Slide Number Placeholder 6">
             <a:extLst>
               <a:ext uri="{FF2B5EF4-FFF2-40B4-BE49-F238E27FC236}">
-                <a16:creationId xmlns:a16="http://schemas.microsoft.com/office/drawing/2014/main" id="{95A6D8C5-39E7-A028-4E4A-73741FFB2086}"/>
+                <a16:creationId xmlns:a16="http://schemas.microsoft.com/office/drawing/2014/main" id="{45272393-48EE-0F24-60C0-40AC76BA7808}"/>
               </a:ext>
             </a:extLst>
           </p:cNvPr>
@@ -1450,7 +1450,7 @@
           <a:bodyPr/>
           <a:lstStyle/>
           <a:p>
-            <a:fld id="{9361F2F8-A3CD-4E9D-9B45-AA7ACC7DECEC}" type="slidenum">
+            <a:fld id="{3E73AC30-073E-4CD1-993C-6630E79B55A9}" type="slidenum">
               <a:rPr lang="en-US" smtClean="0"/>
               <a:t>‹#›</a:t>
             </a:fld>
@@ -1461,7 +1461,7 @@
     </p:spTree>
     <p:extLst>
       <p:ext uri="{BB962C8B-B14F-4D97-AF65-F5344CB8AC3E}">
-        <p14:creationId xmlns:p14="http://schemas.microsoft.com/office/powerpoint/2010/main" val="1662414381"/>
+        <p14:creationId xmlns:p14="http://schemas.microsoft.com/office/powerpoint/2010/main" val="881252901"/>
       </p:ext>
     </p:extLst>
   </p:cSld>
@@ -1493,7 +1493,7 @@
           <p:cNvPr id="2" name="Title 1">
             <a:extLst>
               <a:ext uri="{FF2B5EF4-FFF2-40B4-BE49-F238E27FC236}">
-                <a16:creationId xmlns:a16="http://schemas.microsoft.com/office/drawing/2014/main" id="{7FCE11C3-F0E4-8255-B00D-A966A8A8E9CA}"/>
+                <a16:creationId xmlns:a16="http://schemas.microsoft.com/office/drawing/2014/main" id="{36E7CAAB-27D4-AC8C-10E7-3F9A54D4A1FB}"/>
               </a:ext>
             </a:extLst>
           </p:cNvPr>
@@ -1526,7 +1526,7 @@
           <p:cNvPr id="3" name="Text Placeholder 2">
             <a:extLst>
               <a:ext uri="{FF2B5EF4-FFF2-40B4-BE49-F238E27FC236}">
-                <a16:creationId xmlns:a16="http://schemas.microsoft.com/office/drawing/2014/main" id="{D7883732-0F37-A765-D9C6-EDF68EF10244}"/>
+                <a16:creationId xmlns:a16="http://schemas.microsoft.com/office/drawing/2014/main" id="{E3DA3115-2947-5BA6-BEEE-84E39B08833A}"/>
               </a:ext>
             </a:extLst>
           </p:cNvPr>
@@ -1597,7 +1597,7 @@
           <p:cNvPr id="4" name="Content Placeholder 3">
             <a:extLst>
               <a:ext uri="{FF2B5EF4-FFF2-40B4-BE49-F238E27FC236}">
-                <a16:creationId xmlns:a16="http://schemas.microsoft.com/office/drawing/2014/main" id="{66BFD4B5-FB58-935C-89C8-EBC538219CA5}"/>
+                <a16:creationId xmlns:a16="http://schemas.microsoft.com/office/drawing/2014/main" id="{3F07BDCB-B8D9-F34D-CC4F-EAB10D8E1294}"/>
               </a:ext>
             </a:extLst>
           </p:cNvPr>
@@ -1659,7 +1659,7 @@
           <p:cNvPr id="5" name="Text Placeholder 4">
             <a:extLst>
               <a:ext uri="{FF2B5EF4-FFF2-40B4-BE49-F238E27FC236}">
-                <a16:creationId xmlns:a16="http://schemas.microsoft.com/office/drawing/2014/main" id="{A46AF1A7-4CC8-9573-268B-46836FCD7148}"/>
+                <a16:creationId xmlns:a16="http://schemas.microsoft.com/office/drawing/2014/main" id="{8B7D4B18-00D8-6E1E-0060-E3BA2136C675}"/>
               </a:ext>
             </a:extLst>
           </p:cNvPr>
@@ -1730,7 +1730,7 @@
           <p:cNvPr id="6" name="Content Placeholder 5">
             <a:extLst>
               <a:ext uri="{FF2B5EF4-FFF2-40B4-BE49-F238E27FC236}">
-                <a16:creationId xmlns:a16="http://schemas.microsoft.com/office/drawing/2014/main" id="{5B06C50D-0DB3-8FB5-4885-D3E3089752D9}"/>
+                <a16:creationId xmlns:a16="http://schemas.microsoft.com/office/drawing/2014/main" id="{9276DC19-722A-CCC7-5E02-AD655FA214E6}"/>
               </a:ext>
             </a:extLst>
           </p:cNvPr>
@@ -1792,7 +1792,7 @@
           <p:cNvPr id="7" name="Date Placeholder 6">
             <a:extLst>
               <a:ext uri="{FF2B5EF4-FFF2-40B4-BE49-F238E27FC236}">
-                <a16:creationId xmlns:a16="http://schemas.microsoft.com/office/drawing/2014/main" id="{1ECF00F0-5E96-543D-F0D8-D587990C8409}"/>
+                <a16:creationId xmlns:a16="http://schemas.microsoft.com/office/drawing/2014/main" id="{6FBA9FF7-5FAF-86FA-AE2F-3D9D01CB3FD0}"/>
               </a:ext>
             </a:extLst>
           </p:cNvPr>
@@ -1808,9 +1808,9 @@
           <a:bodyPr/>
           <a:lstStyle/>
           <a:p>
-            <a:fld id="{8640AB0A-39C8-4D5F-8DB0-2D5859300311}" type="datetimeFigureOut">
+            <a:fld id="{3DE2E1D5-A90B-45F4-80DF-D7994070D3D2}" type="datetimeFigureOut">
               <a:rPr lang="en-US" smtClean="0"/>
-              <a:t>3/16/2026</a:t>
+              <a:t>7/18/2022</a:t>
             </a:fld>
             <a:endParaRPr lang="en-US"/>
           </a:p>
@@ -1821,7 +1821,7 @@
           <p:cNvPr id="8" name="Footer Placeholder 7">
             <a:extLst>
               <a:ext uri="{FF2B5EF4-FFF2-40B4-BE49-F238E27FC236}">
-                <a16:creationId xmlns:a16="http://schemas.microsoft.com/office/drawing/2014/main" id="{9236252E-7CB7-D51D-33C0-BA8E6D70EB7A}"/>
+                <a16:creationId xmlns:a16="http://schemas.microsoft.com/office/drawing/2014/main" id="{FED7A9FF-7FBA-8FBA-0B04-EFBCB0110B74}"/>
               </a:ext>
             </a:extLst>
           </p:cNvPr>
@@ -1846,7 +1846,7 @@
           <p:cNvPr id="9" name="Slide Number Placeholder 8">
             <a:extLst>
               <a:ext uri="{FF2B5EF4-FFF2-40B4-BE49-F238E27FC236}">
-                <a16:creationId xmlns:a16="http://schemas.microsoft.com/office/drawing/2014/main" id="{C4E87D6B-90FE-FFC8-7CA7-664C0D8DCAF5}"/>
+                <a16:creationId xmlns:a16="http://schemas.microsoft.com/office/drawing/2014/main" id="{B554A064-F23E-0219-91A2-8D4C6CD1A5D4}"/>
               </a:ext>
             </a:extLst>
           </p:cNvPr>
@@ -1862,7 +1862,7 @@
           <a:bodyPr/>
           <a:lstStyle/>
           <a:p>
-            <a:fld id="{9361F2F8-A3CD-4E9D-9B45-AA7ACC7DECEC}" type="slidenum">
+            <a:fld id="{3E73AC30-073E-4CD1-993C-6630E79B55A9}" type="slidenum">
               <a:rPr lang="en-US" smtClean="0"/>
               <a:t>‹#›</a:t>
             </a:fld>
@@ -1873,7 +1873,7 @@
     </p:spTree>
     <p:extLst>
       <p:ext uri="{BB962C8B-B14F-4D97-AF65-F5344CB8AC3E}">
-        <p14:creationId xmlns:p14="http://schemas.microsoft.com/office/powerpoint/2010/main" val="3347981107"/>
+        <p14:creationId xmlns:p14="http://schemas.microsoft.com/office/powerpoint/2010/main" val="1327943044"/>
       </p:ext>
     </p:extLst>
   </p:cSld>
@@ -1905,7 +1905,7 @@
           <p:cNvPr id="2" name="Title 1">
             <a:extLst>
               <a:ext uri="{FF2B5EF4-FFF2-40B4-BE49-F238E27FC236}">
-                <a16:creationId xmlns:a16="http://schemas.microsoft.com/office/drawing/2014/main" id="{B96C9DAA-1B45-21E4-3A98-674A66993F52}"/>
+                <a16:creationId xmlns:a16="http://schemas.microsoft.com/office/drawing/2014/main" id="{C6414F0C-462B-57A4-FC74-8523DC024052}"/>
               </a:ext>
             </a:extLst>
           </p:cNvPr>
@@ -1933,7 +1933,7 @@
           <p:cNvPr id="3" name="Date Placeholder 2">
             <a:extLst>
               <a:ext uri="{FF2B5EF4-FFF2-40B4-BE49-F238E27FC236}">
-                <a16:creationId xmlns:a16="http://schemas.microsoft.com/office/drawing/2014/main" id="{1F1775A7-E949-F39A-11E4-36CD5FF9DC1C}"/>
+                <a16:creationId xmlns:a16="http://schemas.microsoft.com/office/drawing/2014/main" id="{0F681C8B-214C-D6F9-8706-802C5985BB82}"/>
               </a:ext>
             </a:extLst>
           </p:cNvPr>
@@ -1949,9 +1949,9 @@
           <a:bodyPr/>
           <a:lstStyle/>
           <a:p>
-            <a:fld id="{8640AB0A-39C8-4D5F-8DB0-2D5859300311}" type="datetimeFigureOut">
+            <a:fld id="{3DE2E1D5-A90B-45F4-80DF-D7994070D3D2}" type="datetimeFigureOut">
               <a:rPr lang="en-US" smtClean="0"/>
-              <a:t>3/16/2026</a:t>
+              <a:t>7/18/2022</a:t>
             </a:fld>
             <a:endParaRPr lang="en-US"/>
           </a:p>
@@ -1962,7 +1962,7 @@
           <p:cNvPr id="4" name="Footer Placeholder 3">
             <a:extLst>
               <a:ext uri="{FF2B5EF4-FFF2-40B4-BE49-F238E27FC236}">
-                <a16:creationId xmlns:a16="http://schemas.microsoft.com/office/drawing/2014/main" id="{A4376571-3D10-A398-4A36-29A591FC3206}"/>
+                <a16:creationId xmlns:a16="http://schemas.microsoft.com/office/drawing/2014/main" id="{FB16156C-D034-2F4A-97BE-737F3EA3D330}"/>
               </a:ext>
             </a:extLst>
           </p:cNvPr>
@@ -1987,7 +1987,7 @@
           <p:cNvPr id="5" name="Slide Number Placeholder 4">
             <a:extLst>
               <a:ext uri="{FF2B5EF4-FFF2-40B4-BE49-F238E27FC236}">
-                <a16:creationId xmlns:a16="http://schemas.microsoft.com/office/drawing/2014/main" id="{74C26E88-7918-1A32-B57F-B89323FD92C3}"/>
+                <a16:creationId xmlns:a16="http://schemas.microsoft.com/office/drawing/2014/main" id="{E07DD455-01E1-E2D4-544F-03DF215D1BCA}"/>
               </a:ext>
             </a:extLst>
           </p:cNvPr>
@@ -2003,7 +2003,7 @@
           <a:bodyPr/>
           <a:lstStyle/>
           <a:p>
-            <a:fld id="{9361F2F8-A3CD-4E9D-9B45-AA7ACC7DECEC}" type="slidenum">
+            <a:fld id="{3E73AC30-073E-4CD1-993C-6630E79B55A9}" type="slidenum">
               <a:rPr lang="en-US" smtClean="0"/>
               <a:t>‹#›</a:t>
             </a:fld>
@@ -2014,7 +2014,7 @@
     </p:spTree>
     <p:extLst>
       <p:ext uri="{BB962C8B-B14F-4D97-AF65-F5344CB8AC3E}">
-        <p14:creationId xmlns:p14="http://schemas.microsoft.com/office/powerpoint/2010/main" val="3147313033"/>
+        <p14:creationId xmlns:p14="http://schemas.microsoft.com/office/powerpoint/2010/main" val="3606370043"/>
       </p:ext>
     </p:extLst>
   </p:cSld>
@@ -2046,7 +2046,7 @@
           <p:cNvPr id="2" name="Date Placeholder 1">
             <a:extLst>
               <a:ext uri="{FF2B5EF4-FFF2-40B4-BE49-F238E27FC236}">
-                <a16:creationId xmlns:a16="http://schemas.microsoft.com/office/drawing/2014/main" id="{E7677752-4AA7-E700-D835-6217E4A92CEC}"/>
+                <a16:creationId xmlns:a16="http://schemas.microsoft.com/office/drawing/2014/main" id="{5F79BE06-C6A5-085D-25BA-8BFFD0FAD03C}"/>
               </a:ext>
             </a:extLst>
           </p:cNvPr>
@@ -2062,9 +2062,9 @@
           <a:bodyPr/>
           <a:lstStyle/>
           <a:p>
-            <a:fld id="{8640AB0A-39C8-4D5F-8DB0-2D5859300311}" type="datetimeFigureOut">
+            <a:fld id="{3DE2E1D5-A90B-45F4-80DF-D7994070D3D2}" type="datetimeFigureOut">
               <a:rPr lang="en-US" smtClean="0"/>
-              <a:t>3/16/2026</a:t>
+              <a:t>7/18/2022</a:t>
             </a:fld>
             <a:endParaRPr lang="en-US"/>
           </a:p>
@@ -2075,7 +2075,7 @@
           <p:cNvPr id="3" name="Footer Placeholder 2">
             <a:extLst>
               <a:ext uri="{FF2B5EF4-FFF2-40B4-BE49-F238E27FC236}">
-                <a16:creationId xmlns:a16="http://schemas.microsoft.com/office/drawing/2014/main" id="{E97008B9-5DF4-5828-4FFD-26B110F782FB}"/>
+                <a16:creationId xmlns:a16="http://schemas.microsoft.com/office/drawing/2014/main" id="{EA7605FD-3525-C414-9094-71C31A160B6D}"/>
               </a:ext>
             </a:extLst>
           </p:cNvPr>
@@ -2100,7 +2100,7 @@
           <p:cNvPr id="4" name="Slide Number Placeholder 3">
             <a:extLst>
               <a:ext uri="{FF2B5EF4-FFF2-40B4-BE49-F238E27FC236}">
-                <a16:creationId xmlns:a16="http://schemas.microsoft.com/office/drawing/2014/main" id="{AC393CDC-AF31-EEB6-0DDF-42FF10330A27}"/>
+                <a16:creationId xmlns:a16="http://schemas.microsoft.com/office/drawing/2014/main" id="{6EC2A38A-C042-A814-F3CD-355246FF5584}"/>
               </a:ext>
             </a:extLst>
           </p:cNvPr>
@@ -2116,7 +2116,7 @@
           <a:bodyPr/>
           <a:lstStyle/>
           <a:p>
-            <a:fld id="{9361F2F8-A3CD-4E9D-9B45-AA7ACC7DECEC}" type="slidenum">
+            <a:fld id="{3E73AC30-073E-4CD1-993C-6630E79B55A9}" type="slidenum">
               <a:rPr lang="en-US" smtClean="0"/>
               <a:t>‹#›</a:t>
             </a:fld>
@@ -2127,7 +2127,7 @@
     </p:spTree>
     <p:extLst>
       <p:ext uri="{BB962C8B-B14F-4D97-AF65-F5344CB8AC3E}">
-        <p14:creationId xmlns:p14="http://schemas.microsoft.com/office/powerpoint/2010/main" val="2466160409"/>
+        <p14:creationId xmlns:p14="http://schemas.microsoft.com/office/powerpoint/2010/main" val="3471356007"/>
       </p:ext>
     </p:extLst>
   </p:cSld>
@@ -2159,7 +2159,7 @@
           <p:cNvPr id="2" name="Title 1">
             <a:extLst>
               <a:ext uri="{FF2B5EF4-FFF2-40B4-BE49-F238E27FC236}">
-                <a16:creationId xmlns:a16="http://schemas.microsoft.com/office/drawing/2014/main" id="{DE38B238-5405-9912-1D05-9AFDB3F3B49A}"/>
+                <a16:creationId xmlns:a16="http://schemas.microsoft.com/office/drawing/2014/main" id="{AF81AED3-55E4-F6C6-99FE-98ABAE6641C1}"/>
               </a:ext>
             </a:extLst>
           </p:cNvPr>
@@ -2196,7 +2196,7 @@
           <p:cNvPr id="3" name="Content Placeholder 2">
             <a:extLst>
               <a:ext uri="{FF2B5EF4-FFF2-40B4-BE49-F238E27FC236}">
-                <a16:creationId xmlns:a16="http://schemas.microsoft.com/office/drawing/2014/main" id="{4D9742F2-3F92-D4C8-6767-D23208123BBB}"/>
+                <a16:creationId xmlns:a16="http://schemas.microsoft.com/office/drawing/2014/main" id="{0B485EE9-13FF-5167-6672-451BE32DAC38}"/>
               </a:ext>
             </a:extLst>
           </p:cNvPr>
@@ -2286,7 +2286,7 @@
           <p:cNvPr id="4" name="Text Placeholder 3">
             <a:extLst>
               <a:ext uri="{FF2B5EF4-FFF2-40B4-BE49-F238E27FC236}">
-                <a16:creationId xmlns:a16="http://schemas.microsoft.com/office/drawing/2014/main" id="{B942CE85-C101-08ED-292D-15BC07B920FD}"/>
+                <a16:creationId xmlns:a16="http://schemas.microsoft.com/office/drawing/2014/main" id="{00B39E83-C23D-CF40-6074-90A964F1521F}"/>
               </a:ext>
             </a:extLst>
           </p:cNvPr>
@@ -2357,7 +2357,7 @@
           <p:cNvPr id="5" name="Date Placeholder 4">
             <a:extLst>
               <a:ext uri="{FF2B5EF4-FFF2-40B4-BE49-F238E27FC236}">
-                <a16:creationId xmlns:a16="http://schemas.microsoft.com/office/drawing/2014/main" id="{997D5FD5-42A5-5A15-9886-C5DC101091E0}"/>
+                <a16:creationId xmlns:a16="http://schemas.microsoft.com/office/drawing/2014/main" id="{53FE6B5C-AAC9-E3AA-ACE7-58EA5950FD25}"/>
               </a:ext>
             </a:extLst>
           </p:cNvPr>
@@ -2373,9 +2373,9 @@
           <a:bodyPr/>
           <a:lstStyle/>
           <a:p>
-            <a:fld id="{8640AB0A-39C8-4D5F-8DB0-2D5859300311}" type="datetimeFigureOut">
+            <a:fld id="{3DE2E1D5-A90B-45F4-80DF-D7994070D3D2}" type="datetimeFigureOut">
               <a:rPr lang="en-US" smtClean="0"/>
-              <a:t>3/16/2026</a:t>
+              <a:t>7/18/2022</a:t>
             </a:fld>
             <a:endParaRPr lang="en-US"/>
           </a:p>
@@ -2386,7 +2386,7 @@
           <p:cNvPr id="6" name="Footer Placeholder 5">
             <a:extLst>
               <a:ext uri="{FF2B5EF4-FFF2-40B4-BE49-F238E27FC236}">
-                <a16:creationId xmlns:a16="http://schemas.microsoft.com/office/drawing/2014/main" id="{7FB61333-7004-60B6-0A8C-06236ACC975D}"/>
+                <a16:creationId xmlns:a16="http://schemas.microsoft.com/office/drawing/2014/main" id="{C7BB4320-C435-E055-F823-3BFAAB2CCAAC}"/>
               </a:ext>
             </a:extLst>
           </p:cNvPr>
@@ -2411,7 +2411,7 @@
           <p:cNvPr id="7" name="Slide Number Placeholder 6">
             <a:extLst>
               <a:ext uri="{FF2B5EF4-FFF2-40B4-BE49-F238E27FC236}">
-                <a16:creationId xmlns:a16="http://schemas.microsoft.com/office/drawing/2014/main" id="{58B9A1CB-3B06-CA94-6D93-C56A995F7872}"/>
+                <a16:creationId xmlns:a16="http://schemas.microsoft.com/office/drawing/2014/main" id="{B1C126EE-2DE1-4089-E9E3-52FCD92A5857}"/>
               </a:ext>
             </a:extLst>
           </p:cNvPr>
@@ -2427,7 +2427,7 @@
           <a:bodyPr/>
           <a:lstStyle/>
           <a:p>
-            <a:fld id="{9361F2F8-A3CD-4E9D-9B45-AA7ACC7DECEC}" type="slidenum">
+            <a:fld id="{3E73AC30-073E-4CD1-993C-6630E79B55A9}" type="slidenum">
               <a:rPr lang="en-US" smtClean="0"/>
               <a:t>‹#›</a:t>
             </a:fld>
@@ -2438,7 +2438,7 @@
     </p:spTree>
     <p:extLst>
       <p:ext uri="{BB962C8B-B14F-4D97-AF65-F5344CB8AC3E}">
-        <p14:creationId xmlns:p14="http://schemas.microsoft.com/office/powerpoint/2010/main" val="3234175938"/>
+        <p14:creationId xmlns:p14="http://schemas.microsoft.com/office/powerpoint/2010/main" val="2947081832"/>
       </p:ext>
     </p:extLst>
   </p:cSld>
@@ -2470,7 +2470,7 @@
           <p:cNvPr id="2" name="Title 1">
             <a:extLst>
               <a:ext uri="{FF2B5EF4-FFF2-40B4-BE49-F238E27FC236}">
-                <a16:creationId xmlns:a16="http://schemas.microsoft.com/office/drawing/2014/main" id="{FEFEDB6D-71E8-5403-2C0F-FA4BF9E3428B}"/>
+                <a16:creationId xmlns:a16="http://schemas.microsoft.com/office/drawing/2014/main" id="{49714CC3-92CC-18CA-845C-5C94A8A20700}"/>
               </a:ext>
             </a:extLst>
           </p:cNvPr>
@@ -2507,7 +2507,7 @@
           <p:cNvPr id="3" name="Picture Placeholder 2">
             <a:extLst>
               <a:ext uri="{FF2B5EF4-FFF2-40B4-BE49-F238E27FC236}">
-                <a16:creationId xmlns:a16="http://schemas.microsoft.com/office/drawing/2014/main" id="{65E85BD3-B55E-0BE5-6575-0312F1C45CEE}"/>
+                <a16:creationId xmlns:a16="http://schemas.microsoft.com/office/drawing/2014/main" id="{35FF043A-68B1-C0A2-5FE7-E44EF27F82F9}"/>
               </a:ext>
             </a:extLst>
           </p:cNvPr>
@@ -2574,7 +2574,7 @@
           <p:cNvPr id="4" name="Text Placeholder 3">
             <a:extLst>
               <a:ext uri="{FF2B5EF4-FFF2-40B4-BE49-F238E27FC236}">
-                <a16:creationId xmlns:a16="http://schemas.microsoft.com/office/drawing/2014/main" id="{253403D0-7154-6EE8-46B5-325200E827F0}"/>
+                <a16:creationId xmlns:a16="http://schemas.microsoft.com/office/drawing/2014/main" id="{392D94C9-82FB-CCD4-A059-C524FAB8FF00}"/>
               </a:ext>
             </a:extLst>
           </p:cNvPr>
@@ -2645,7 +2645,7 @@
           <p:cNvPr id="5" name="Date Placeholder 4">
             <a:extLst>
               <a:ext uri="{FF2B5EF4-FFF2-40B4-BE49-F238E27FC236}">
-                <a16:creationId xmlns:a16="http://schemas.microsoft.com/office/drawing/2014/main" id="{408950E0-8F5D-1BDC-BB48-E39328177D05}"/>
+                <a16:creationId xmlns:a16="http://schemas.microsoft.com/office/drawing/2014/main" id="{C1844377-7966-FB92-A4C2-CB5279175EF8}"/>
               </a:ext>
             </a:extLst>
           </p:cNvPr>
@@ -2661,9 +2661,9 @@
           <a:bodyPr/>
           <a:lstStyle/>
           <a:p>
-            <a:fld id="{8640AB0A-39C8-4D5F-8DB0-2D5859300311}" type="datetimeFigureOut">
+            <a:fld id="{3DE2E1D5-A90B-45F4-80DF-D7994070D3D2}" type="datetimeFigureOut">
               <a:rPr lang="en-US" smtClean="0"/>
-              <a:t>3/16/2026</a:t>
+              <a:t>7/18/2022</a:t>
             </a:fld>
             <a:endParaRPr lang="en-US"/>
           </a:p>
@@ -2674,7 +2674,7 @@
           <p:cNvPr id="6" name="Footer Placeholder 5">
             <a:extLst>
               <a:ext uri="{FF2B5EF4-FFF2-40B4-BE49-F238E27FC236}">
-                <a16:creationId xmlns:a16="http://schemas.microsoft.com/office/drawing/2014/main" id="{C599CDD3-93E5-F4F1-B2AA-039A546CF609}"/>
+                <a16:creationId xmlns:a16="http://schemas.microsoft.com/office/drawing/2014/main" id="{21D4CA13-07B6-FE2B-D731-F1BFBEDD488A}"/>
               </a:ext>
             </a:extLst>
           </p:cNvPr>
@@ -2699,7 +2699,7 @@
           <p:cNvPr id="7" name="Slide Number Placeholder 6">
             <a:extLst>
               <a:ext uri="{FF2B5EF4-FFF2-40B4-BE49-F238E27FC236}">
-                <a16:creationId xmlns:a16="http://schemas.microsoft.com/office/drawing/2014/main" id="{C009E0F4-3C0C-0BBC-B834-7FD6FFA56D53}"/>
+                <a16:creationId xmlns:a16="http://schemas.microsoft.com/office/drawing/2014/main" id="{B52D5683-3DAA-9656-08A9-B7DD1106B1F8}"/>
               </a:ext>
             </a:extLst>
           </p:cNvPr>
@@ -2715,7 +2715,7 @@
           <a:bodyPr/>
           <a:lstStyle/>
           <a:p>
-            <a:fld id="{9361F2F8-A3CD-4E9D-9B45-AA7ACC7DECEC}" type="slidenum">
+            <a:fld id="{3E73AC30-073E-4CD1-993C-6630E79B55A9}" type="slidenum">
               <a:rPr lang="en-US" smtClean="0"/>
               <a:t>‹#›</a:t>
             </a:fld>
@@ -2726,7 +2726,7 @@
     </p:spTree>
     <p:extLst>
       <p:ext uri="{BB962C8B-B14F-4D97-AF65-F5344CB8AC3E}">
-        <p14:creationId xmlns:p14="http://schemas.microsoft.com/office/powerpoint/2010/main" val="4073812504"/>
+        <p14:creationId xmlns:p14="http://schemas.microsoft.com/office/powerpoint/2010/main" val="2332730845"/>
       </p:ext>
     </p:extLst>
   </p:cSld>
@@ -2763,7 +2763,7 @@
           <p:cNvPr id="2" name="Title Placeholder 1">
             <a:extLst>
               <a:ext uri="{FF2B5EF4-FFF2-40B4-BE49-F238E27FC236}">
-                <a16:creationId xmlns:a16="http://schemas.microsoft.com/office/drawing/2014/main" id="{3F5DEC63-B449-B8DB-0F5E-773093C4988E}"/>
+                <a16:creationId xmlns:a16="http://schemas.microsoft.com/office/drawing/2014/main" id="{577EEA32-40F2-D70D-7738-A3BDFCD39D59}"/>
               </a:ext>
             </a:extLst>
           </p:cNvPr>
@@ -2801,7 +2801,7 @@
           <p:cNvPr id="3" name="Text Placeholder 2">
             <a:extLst>
               <a:ext uri="{FF2B5EF4-FFF2-40B4-BE49-F238E27FC236}">
-                <a16:creationId xmlns:a16="http://schemas.microsoft.com/office/drawing/2014/main" id="{F031EAD2-0822-ACF3-E7A9-D6D8034CC3FE}"/>
+                <a16:creationId xmlns:a16="http://schemas.microsoft.com/office/drawing/2014/main" id="{0184801B-3917-2D03-60EA-F4423532F06E}"/>
               </a:ext>
             </a:extLst>
           </p:cNvPr>
@@ -2868,7 +2868,7 @@
           <p:cNvPr id="4" name="Date Placeholder 3">
             <a:extLst>
               <a:ext uri="{FF2B5EF4-FFF2-40B4-BE49-F238E27FC236}">
-                <a16:creationId xmlns:a16="http://schemas.microsoft.com/office/drawing/2014/main" id="{B6763C2E-16FE-096C-E57F-4DB8DE328982}"/>
+                <a16:creationId xmlns:a16="http://schemas.microsoft.com/office/drawing/2014/main" id="{C4551304-54AB-078D-E6FF-184B61A003CE}"/>
               </a:ext>
             </a:extLst>
           </p:cNvPr>
@@ -2895,16 +2895,16 @@
               <a:defRPr sz="1200">
                 <a:solidFill>
                   <a:schemeClr val="tx1">
-                    <a:tint val="82000"/>
+                    <a:tint val="75000"/>
                   </a:schemeClr>
                 </a:solidFill>
               </a:defRPr>
             </a:lvl1pPr>
           </a:lstStyle>
           <a:p>
-            <a:fld id="{8640AB0A-39C8-4D5F-8DB0-2D5859300311}" type="datetimeFigureOut">
+            <a:fld id="{3DE2E1D5-A90B-45F4-80DF-D7994070D3D2}" type="datetimeFigureOut">
               <a:rPr lang="en-US" smtClean="0"/>
-              <a:t>3/16/2026</a:t>
+              <a:t>7/18/2022</a:t>
             </a:fld>
             <a:endParaRPr lang="en-US"/>
           </a:p>
@@ -2915,7 +2915,7 @@
           <p:cNvPr id="5" name="Footer Placeholder 4">
             <a:extLst>
               <a:ext uri="{FF2B5EF4-FFF2-40B4-BE49-F238E27FC236}">
-                <a16:creationId xmlns:a16="http://schemas.microsoft.com/office/drawing/2014/main" id="{FE3EF6D6-1042-DA1A-0CDA-78ADE14ACDA0}"/>
+                <a16:creationId xmlns:a16="http://schemas.microsoft.com/office/drawing/2014/main" id="{4B95AA8E-637C-FA23-EF8D-3C5BF6CA838C}"/>
               </a:ext>
             </a:extLst>
           </p:cNvPr>
@@ -2942,7 +2942,7 @@
               <a:defRPr sz="1200">
                 <a:solidFill>
                   <a:schemeClr val="tx1">
-                    <a:tint val="82000"/>
+                    <a:tint val="75000"/>
                   </a:schemeClr>
                 </a:solidFill>
               </a:defRPr>
@@ -2958,7 +2958,7 @@
           <p:cNvPr id="6" name="Slide Number Placeholder 5">
             <a:extLst>
               <a:ext uri="{FF2B5EF4-FFF2-40B4-BE49-F238E27FC236}">
-                <a16:creationId xmlns:a16="http://schemas.microsoft.com/office/drawing/2014/main" id="{4F9A853E-11E9-EB42-7952-90179B5D1ACF}"/>
+                <a16:creationId xmlns:a16="http://schemas.microsoft.com/office/drawing/2014/main" id="{659A0F0F-4472-0818-14CB-53908E7DD79E}"/>
               </a:ext>
             </a:extLst>
           </p:cNvPr>
@@ -2985,14 +2985,14 @@
               <a:defRPr sz="1200">
                 <a:solidFill>
                   <a:schemeClr val="tx1">
-                    <a:tint val="82000"/>
+                    <a:tint val="75000"/>
                   </a:schemeClr>
                 </a:solidFill>
               </a:defRPr>
             </a:lvl1pPr>
           </a:lstStyle>
           <a:p>
-            <a:fld id="{9361F2F8-A3CD-4E9D-9B45-AA7ACC7DECEC}" type="slidenum">
+            <a:fld id="{3E73AC30-073E-4CD1-993C-6630E79B55A9}" type="slidenum">
               <a:rPr lang="en-US" smtClean="0"/>
               <a:t>‹#›</a:t>
             </a:fld>
@@ -3003,7 +3003,7 @@
     </p:spTree>
     <p:extLst>
       <p:ext uri="{BB962C8B-B14F-4D97-AF65-F5344CB8AC3E}">
-        <p14:creationId xmlns:p14="http://schemas.microsoft.com/office/powerpoint/2010/main" val="3789377524"/>
+        <p14:creationId xmlns:p14="http://schemas.microsoft.com/office/powerpoint/2010/main" val="1506460411"/>
       </p:ext>
     </p:extLst>
   </p:cSld>
@@ -3326,7 +3326,7 @@
           <p:cNvPr id="2" name="Title 1">
             <a:extLst>
               <a:ext uri="{FF2B5EF4-FFF2-40B4-BE49-F238E27FC236}">
-                <a16:creationId xmlns:a16="http://schemas.microsoft.com/office/drawing/2014/main" id="{55CC4000-CBDD-A192-427B-FCB8C93E92D5}"/>
+                <a16:creationId xmlns:a16="http://schemas.microsoft.com/office/drawing/2014/main" id="{819EC8DF-8615-23D8-3628-9CF3B062BA50}"/>
               </a:ext>
             </a:extLst>
           </p:cNvPr>
@@ -3354,7 +3354,7 @@
           <p:cNvPr id="3" name="Content Placeholder 2">
             <a:extLst>
               <a:ext uri="{FF2B5EF4-FFF2-40B4-BE49-F238E27FC236}">
-                <a16:creationId xmlns:a16="http://schemas.microsoft.com/office/drawing/2014/main" id="{74061AC4-A4DD-F994-A440-CFFD6F523762}"/>
+                <a16:creationId xmlns:a16="http://schemas.microsoft.com/office/drawing/2014/main" id="{E5DA9588-A934-7DAB-C60F-4140F2BEB0B2}"/>
               </a:ext>
             </a:extLst>
           </p:cNvPr>
@@ -3377,7 +3377,7 @@
     </p:spTree>
     <p:extLst>
       <p:ext uri="{BB962C8B-B14F-4D97-AF65-F5344CB8AC3E}">
-        <p14:creationId xmlns:p14="http://schemas.microsoft.com/office/powerpoint/2010/main" val="4009141093"/>
+        <p14:creationId xmlns:p14="http://schemas.microsoft.com/office/powerpoint/2010/main" val="223276996"/>
       </p:ext>
     </p:extLst>
   </p:cSld>
@@ -3398,39 +3398,39 @@
         <a:sysClr val="window" lastClr="FFFFFF"/>
       </a:lt1>
       <a:dk2>
-        <a:srgbClr val="0E2841"/>
+        <a:srgbClr val="44546A"/>
       </a:dk2>
       <a:lt2>
-        <a:srgbClr val="E8E8E8"/>
+        <a:srgbClr val="E7E6E6"/>
       </a:lt2>
       <a:accent1>
-        <a:srgbClr val="156082"/>
+        <a:srgbClr val="4472C4"/>
       </a:accent1>
       <a:accent2>
-        <a:srgbClr val="E97132"/>
+        <a:srgbClr val="ED7D31"/>
       </a:accent2>
       <a:accent3>
-        <a:srgbClr val="196B24"/>
+        <a:srgbClr val="A5A5A5"/>
       </a:accent3>
       <a:accent4>
-        <a:srgbClr val="0F9ED5"/>
+        <a:srgbClr val="FFC000"/>
       </a:accent4>
       <a:accent5>
-        <a:srgbClr val="A02B93"/>
+        <a:srgbClr val="5B9BD5"/>
       </a:accent5>
       <a:accent6>
-        <a:srgbClr val="4EA72E"/>
+        <a:srgbClr val="70AD47"/>
       </a:accent6>
       <a:hlink>
-        <a:srgbClr val="467886"/>
+        <a:srgbClr val="0563C1"/>
       </a:hlink>
       <a:folHlink>
-        <a:srgbClr val="96607D"/>
+        <a:srgbClr val="954F72"/>
       </a:folHlink>
     </a:clrScheme>
     <a:fontScheme name="Office">
       <a:majorFont>
-        <a:latin typeface="Aptos Display" panose="02110004020202020204"/>
+        <a:latin typeface="Calibri Light" panose="020F0302020204030204"/>
         <a:ea typeface=""/>
         <a:cs typeface=""/>
         <a:font script="Jpan" typeface="游ゴシック Light"/>
@@ -3482,7 +3482,7 @@
         <a:font script="Tfng" typeface="Ebrima"/>
       </a:majorFont>
       <a:minorFont>
-        <a:latin typeface="Aptos" panose="02110004020202020204"/>
+        <a:latin typeface="Calibri" panose="020F0502020204030204"/>
         <a:ea typeface=""/>
         <a:cs typeface=""/>
         <a:font script="Jpan" typeface="游ゴシック"/>
@@ -3593,6 +3593,13 @@
         </a:gradFill>
       </a:fillStyleLst>
       <a:lnStyleLst>
+        <a:ln w="6350" cap="flat" cmpd="sng" algn="ctr">
+          <a:solidFill>
+            <a:schemeClr val="phClr"/>
+          </a:solidFill>
+          <a:prstDash val="solid"/>
+          <a:miter lim="800000"/>
+        </a:ln>
         <a:ln w="12700" cap="flat" cmpd="sng" algn="ctr">
           <a:solidFill>
             <a:schemeClr val="phClr"/>
@@ -3601,13 +3608,6 @@
           <a:miter lim="800000"/>
         </a:ln>
         <a:ln w="19050" cap="flat" cmpd="sng" algn="ctr">
-          <a:solidFill>
-            <a:schemeClr val="phClr"/>
-          </a:solidFill>
-          <a:prstDash val="solid"/>
-          <a:miter lim="800000"/>
-        </a:ln>
-        <a:ln w="25400" cap="flat" cmpd="sng" algn="ctr">
           <a:solidFill>
             <a:schemeClr val="phClr"/>
           </a:solidFill>
@@ -3672,31 +3672,11 @@
       </a:bgFillStyleLst>
     </a:fmtScheme>
   </a:themeElements>
-  <a:objectDefaults>
-    <a:lnDef>
-      <a:spPr/>
-      <a:bodyPr/>
-      <a:lstStyle/>
-      <a:style>
-        <a:lnRef idx="2">
-          <a:schemeClr val="accent1"/>
-        </a:lnRef>
-        <a:fillRef idx="0">
-          <a:schemeClr val="accent1"/>
-        </a:fillRef>
-        <a:effectRef idx="1">
-          <a:schemeClr val="accent1"/>
-        </a:effectRef>
-        <a:fontRef idx="minor">
-          <a:schemeClr val="tx1"/>
-        </a:fontRef>
-      </a:style>
-    </a:lnDef>
-  </a:objectDefaults>
+  <a:objectDefaults/>
   <a:extraClrSchemeLst/>
   <a:extLst>
     <a:ext uri="{05A4C25C-085E-4340-85A3-A5531E510DB2}">
-      <thm15:themeFamily xmlns:thm15="http://schemas.microsoft.com/office/thememl/2012/main" name="Office Theme" id="{2E142A2C-CD16-42D6-873A-C26D2A0506FA}" vid="{1BDDFF52-6CD6-40A5-AB3C-68EB2F1E4D0A}"/>
+      <thm15:themeFamily xmlns:thm15="http://schemas.microsoft.com/office/thememl/2012/main" name="Office Theme" id="{62F939B6-93AF-4DB8-9C6B-D6C7DFDC589F}" vid="{4A3C46E8-61CC-4603-A589-7422A47A8E4A}"/>
     </a:ext>
   </a:extLst>
 </a:theme>

--- a/samples/test_pptx.pptx
+++ b/samples/test_pptx.pptx
@@ -129,7 +129,7 @@
           <p:cNvPr id="2" name="Title 1">
             <a:extLst>
               <a:ext uri="{FF2B5EF4-FFF2-40B4-BE49-F238E27FC236}">
-                <a16:creationId xmlns:a16="http://schemas.microsoft.com/office/drawing/2014/main" id="{F3980D6E-55D1-1FBC-282C-39128E0FA95F}"/>
+                <a16:creationId xmlns:a16="http://schemas.microsoft.com/office/drawing/2014/main" id="{B9721617-4036-706C-F69F-3665592C4064}"/>
               </a:ext>
             </a:extLst>
           </p:cNvPr>
@@ -166,7 +166,7 @@
           <p:cNvPr id="3" name="Subtitle 2">
             <a:extLst>
               <a:ext uri="{FF2B5EF4-FFF2-40B4-BE49-F238E27FC236}">
-                <a16:creationId xmlns:a16="http://schemas.microsoft.com/office/drawing/2014/main" id="{DEA0689B-8E5A-ADB2-445E-9E95E7C4908C}"/>
+                <a16:creationId xmlns:a16="http://schemas.microsoft.com/office/drawing/2014/main" id="{9F51769B-01BD-FE44-1ABD-0E528FD1FDF3}"/>
               </a:ext>
             </a:extLst>
           </p:cNvPr>
@@ -236,7 +236,7 @@
           <p:cNvPr id="4" name="Date Placeholder 3">
             <a:extLst>
               <a:ext uri="{FF2B5EF4-FFF2-40B4-BE49-F238E27FC236}">
-                <a16:creationId xmlns:a16="http://schemas.microsoft.com/office/drawing/2014/main" id="{B6EF1E9F-B3FD-F418-13CE-4FE22F9A2CDD}"/>
+                <a16:creationId xmlns:a16="http://schemas.microsoft.com/office/drawing/2014/main" id="{F5D17369-4F7E-3C12-7544-9A0A093C820F}"/>
               </a:ext>
             </a:extLst>
           </p:cNvPr>
@@ -252,9 +252,9 @@
           <a:bodyPr/>
           <a:lstStyle/>
           <a:p>
-            <a:fld id="{3DE2E1D5-A90B-45F4-80DF-D7994070D3D2}" type="datetimeFigureOut">
+            <a:fld id="{CBFBF2EA-DCA5-4BA8-BC03-B27E08876126}" type="datetimeFigureOut">
               <a:rPr lang="en-US" smtClean="0"/>
-              <a:t>7/18/2022</a:t>
+              <a:t>5/17/2026</a:t>
             </a:fld>
             <a:endParaRPr lang="en-US"/>
           </a:p>
@@ -265,7 +265,7 @@
           <p:cNvPr id="5" name="Footer Placeholder 4">
             <a:extLst>
               <a:ext uri="{FF2B5EF4-FFF2-40B4-BE49-F238E27FC236}">
-                <a16:creationId xmlns:a16="http://schemas.microsoft.com/office/drawing/2014/main" id="{3FE08529-9C72-EEBD-8C7C-21FB8C22C853}"/>
+                <a16:creationId xmlns:a16="http://schemas.microsoft.com/office/drawing/2014/main" id="{F24DCBC4-2D0C-0BB9-17E2-234FFA5CAAE5}"/>
               </a:ext>
             </a:extLst>
           </p:cNvPr>
@@ -290,7 +290,7 @@
           <p:cNvPr id="6" name="Slide Number Placeholder 5">
             <a:extLst>
               <a:ext uri="{FF2B5EF4-FFF2-40B4-BE49-F238E27FC236}">
-                <a16:creationId xmlns:a16="http://schemas.microsoft.com/office/drawing/2014/main" id="{382700DE-907A-2557-BDC3-15521A9B6A6C}"/>
+                <a16:creationId xmlns:a16="http://schemas.microsoft.com/office/drawing/2014/main" id="{532C8A76-1A28-CB01-AC6E-C1AE94949C36}"/>
               </a:ext>
             </a:extLst>
           </p:cNvPr>
@@ -306,7 +306,7 @@
           <a:bodyPr/>
           <a:lstStyle/>
           <a:p>
-            <a:fld id="{3E73AC30-073E-4CD1-993C-6630E79B55A9}" type="slidenum">
+            <a:fld id="{3627C499-8D20-466E-8BD2-CC7391BCFA86}" type="slidenum">
               <a:rPr lang="en-US" smtClean="0"/>
               <a:t>‹#›</a:t>
             </a:fld>
@@ -317,7 +317,7 @@
     </p:spTree>
     <p:extLst>
       <p:ext uri="{BB962C8B-B14F-4D97-AF65-F5344CB8AC3E}">
-        <p14:creationId xmlns:p14="http://schemas.microsoft.com/office/powerpoint/2010/main" val="1115451144"/>
+        <p14:creationId xmlns:p14="http://schemas.microsoft.com/office/powerpoint/2010/main" val="2258664607"/>
       </p:ext>
     </p:extLst>
   </p:cSld>
@@ -349,7 +349,7 @@
           <p:cNvPr id="2" name="Title 1">
             <a:extLst>
               <a:ext uri="{FF2B5EF4-FFF2-40B4-BE49-F238E27FC236}">
-                <a16:creationId xmlns:a16="http://schemas.microsoft.com/office/drawing/2014/main" id="{C3977873-E4C6-4E47-1AEB-F6031484D702}"/>
+                <a16:creationId xmlns:a16="http://schemas.microsoft.com/office/drawing/2014/main" id="{5E17F16D-7C21-90C1-7A33-4EFCEE120236}"/>
               </a:ext>
             </a:extLst>
           </p:cNvPr>
@@ -377,7 +377,7 @@
           <p:cNvPr id="3" name="Vertical Text Placeholder 2">
             <a:extLst>
               <a:ext uri="{FF2B5EF4-FFF2-40B4-BE49-F238E27FC236}">
-                <a16:creationId xmlns:a16="http://schemas.microsoft.com/office/drawing/2014/main" id="{BB4CC56F-850F-65B8-9947-8A9E83551EC4}"/>
+                <a16:creationId xmlns:a16="http://schemas.microsoft.com/office/drawing/2014/main" id="{BD93DF4C-27B0-0C40-B65A-1CEB6E1D7AFA}"/>
               </a:ext>
             </a:extLst>
           </p:cNvPr>
@@ -434,7 +434,7 @@
           <p:cNvPr id="4" name="Date Placeholder 3">
             <a:extLst>
               <a:ext uri="{FF2B5EF4-FFF2-40B4-BE49-F238E27FC236}">
-                <a16:creationId xmlns:a16="http://schemas.microsoft.com/office/drawing/2014/main" id="{981C69D7-7385-DD5F-7A81-098C04C416E4}"/>
+                <a16:creationId xmlns:a16="http://schemas.microsoft.com/office/drawing/2014/main" id="{CAC06E6E-5C8D-7346-4EA5-ED0DFFE2C56B}"/>
               </a:ext>
             </a:extLst>
           </p:cNvPr>
@@ -450,9 +450,9 @@
           <a:bodyPr/>
           <a:lstStyle/>
           <a:p>
-            <a:fld id="{3DE2E1D5-A90B-45F4-80DF-D7994070D3D2}" type="datetimeFigureOut">
+            <a:fld id="{CBFBF2EA-DCA5-4BA8-BC03-B27E08876126}" type="datetimeFigureOut">
               <a:rPr lang="en-US" smtClean="0"/>
-              <a:t>7/18/2022</a:t>
+              <a:t>5/17/2026</a:t>
             </a:fld>
             <a:endParaRPr lang="en-US"/>
           </a:p>
@@ -463,7 +463,7 @@
           <p:cNvPr id="5" name="Footer Placeholder 4">
             <a:extLst>
               <a:ext uri="{FF2B5EF4-FFF2-40B4-BE49-F238E27FC236}">
-                <a16:creationId xmlns:a16="http://schemas.microsoft.com/office/drawing/2014/main" id="{E238F51D-50AF-DC43-F818-6D859A807C28}"/>
+                <a16:creationId xmlns:a16="http://schemas.microsoft.com/office/drawing/2014/main" id="{53260391-AD69-FDB8-3FC9-6C1A1CD04863}"/>
               </a:ext>
             </a:extLst>
           </p:cNvPr>
@@ -488,7 +488,7 @@
           <p:cNvPr id="6" name="Slide Number Placeholder 5">
             <a:extLst>
               <a:ext uri="{FF2B5EF4-FFF2-40B4-BE49-F238E27FC236}">
-                <a16:creationId xmlns:a16="http://schemas.microsoft.com/office/drawing/2014/main" id="{8BFC852E-0CC5-DB11-A9EF-CC5197FD564F}"/>
+                <a16:creationId xmlns:a16="http://schemas.microsoft.com/office/drawing/2014/main" id="{8C42B3E2-5521-312D-4471-33AF92BFA23F}"/>
               </a:ext>
             </a:extLst>
           </p:cNvPr>
@@ -504,7 +504,7 @@
           <a:bodyPr/>
           <a:lstStyle/>
           <a:p>
-            <a:fld id="{3E73AC30-073E-4CD1-993C-6630E79B55A9}" type="slidenum">
+            <a:fld id="{3627C499-8D20-466E-8BD2-CC7391BCFA86}" type="slidenum">
               <a:rPr lang="en-US" smtClean="0"/>
               <a:t>‹#›</a:t>
             </a:fld>
@@ -515,7 +515,7 @@
     </p:spTree>
     <p:extLst>
       <p:ext uri="{BB962C8B-B14F-4D97-AF65-F5344CB8AC3E}">
-        <p14:creationId xmlns:p14="http://schemas.microsoft.com/office/powerpoint/2010/main" val="177187198"/>
+        <p14:creationId xmlns:p14="http://schemas.microsoft.com/office/powerpoint/2010/main" val="1393055715"/>
       </p:ext>
     </p:extLst>
   </p:cSld>
@@ -547,7 +547,7 @@
           <p:cNvPr id="2" name="Vertical Title 1">
             <a:extLst>
               <a:ext uri="{FF2B5EF4-FFF2-40B4-BE49-F238E27FC236}">
-                <a16:creationId xmlns:a16="http://schemas.microsoft.com/office/drawing/2014/main" id="{79AD5E47-0165-1AD5-80BF-E47EC25343D8}"/>
+                <a16:creationId xmlns:a16="http://schemas.microsoft.com/office/drawing/2014/main" id="{B00EF7E1-92CE-6915-3EAB-AF5DDDC1513F}"/>
               </a:ext>
             </a:extLst>
           </p:cNvPr>
@@ -580,7 +580,7 @@
           <p:cNvPr id="3" name="Vertical Text Placeholder 2">
             <a:extLst>
               <a:ext uri="{FF2B5EF4-FFF2-40B4-BE49-F238E27FC236}">
-                <a16:creationId xmlns:a16="http://schemas.microsoft.com/office/drawing/2014/main" id="{87D55867-F6FF-0D76-3291-B229103FC16E}"/>
+                <a16:creationId xmlns:a16="http://schemas.microsoft.com/office/drawing/2014/main" id="{4C8DDA5D-9F1F-8533-E62D-61AE7DD4152D}"/>
               </a:ext>
             </a:extLst>
           </p:cNvPr>
@@ -642,7 +642,7 @@
           <p:cNvPr id="4" name="Date Placeholder 3">
             <a:extLst>
               <a:ext uri="{FF2B5EF4-FFF2-40B4-BE49-F238E27FC236}">
-                <a16:creationId xmlns:a16="http://schemas.microsoft.com/office/drawing/2014/main" id="{778AE0BD-0A51-A2FE-EC6E-DA6941DA2A48}"/>
+                <a16:creationId xmlns:a16="http://schemas.microsoft.com/office/drawing/2014/main" id="{53CB14F1-7043-4853-2443-3A60E54039C8}"/>
               </a:ext>
             </a:extLst>
           </p:cNvPr>
@@ -658,9 +658,9 @@
           <a:bodyPr/>
           <a:lstStyle/>
           <a:p>
-            <a:fld id="{3DE2E1D5-A90B-45F4-80DF-D7994070D3D2}" type="datetimeFigureOut">
+            <a:fld id="{CBFBF2EA-DCA5-4BA8-BC03-B27E08876126}" type="datetimeFigureOut">
               <a:rPr lang="en-US" smtClean="0"/>
-              <a:t>7/18/2022</a:t>
+              <a:t>5/17/2026</a:t>
             </a:fld>
             <a:endParaRPr lang="en-US"/>
           </a:p>
@@ -671,7 +671,7 @@
           <p:cNvPr id="5" name="Footer Placeholder 4">
             <a:extLst>
               <a:ext uri="{FF2B5EF4-FFF2-40B4-BE49-F238E27FC236}">
-                <a16:creationId xmlns:a16="http://schemas.microsoft.com/office/drawing/2014/main" id="{70098DBC-FBD9-2FB7-31E4-416A3828EB6E}"/>
+                <a16:creationId xmlns:a16="http://schemas.microsoft.com/office/drawing/2014/main" id="{13FD9703-0AAE-33DF-A00D-38989A3B3DCB}"/>
               </a:ext>
             </a:extLst>
           </p:cNvPr>
@@ -696,7 +696,7 @@
           <p:cNvPr id="6" name="Slide Number Placeholder 5">
             <a:extLst>
               <a:ext uri="{FF2B5EF4-FFF2-40B4-BE49-F238E27FC236}">
-                <a16:creationId xmlns:a16="http://schemas.microsoft.com/office/drawing/2014/main" id="{77C1200D-2D58-0DE0-A9DB-A1C6F13EFCE7}"/>
+                <a16:creationId xmlns:a16="http://schemas.microsoft.com/office/drawing/2014/main" id="{80747893-8718-6F2F-DED8-D31505C07370}"/>
               </a:ext>
             </a:extLst>
           </p:cNvPr>
@@ -712,7 +712,7 @@
           <a:bodyPr/>
           <a:lstStyle/>
           <a:p>
-            <a:fld id="{3E73AC30-073E-4CD1-993C-6630E79B55A9}" type="slidenum">
+            <a:fld id="{3627C499-8D20-466E-8BD2-CC7391BCFA86}" type="slidenum">
               <a:rPr lang="en-US" smtClean="0"/>
               <a:t>‹#›</a:t>
             </a:fld>
@@ -723,7 +723,7 @@
     </p:spTree>
     <p:extLst>
       <p:ext uri="{BB962C8B-B14F-4D97-AF65-F5344CB8AC3E}">
-        <p14:creationId xmlns:p14="http://schemas.microsoft.com/office/powerpoint/2010/main" val="3397545774"/>
+        <p14:creationId xmlns:p14="http://schemas.microsoft.com/office/powerpoint/2010/main" val="2943776124"/>
       </p:ext>
     </p:extLst>
   </p:cSld>
@@ -755,7 +755,7 @@
           <p:cNvPr id="2" name="Title 1">
             <a:extLst>
               <a:ext uri="{FF2B5EF4-FFF2-40B4-BE49-F238E27FC236}">
-                <a16:creationId xmlns:a16="http://schemas.microsoft.com/office/drawing/2014/main" id="{C661A189-2D1F-AA3F-C090-BA34303C230E}"/>
+                <a16:creationId xmlns:a16="http://schemas.microsoft.com/office/drawing/2014/main" id="{9EA43F71-20BE-5EB2-8E1A-59D060800ADA}"/>
               </a:ext>
             </a:extLst>
           </p:cNvPr>
@@ -783,7 +783,7 @@
           <p:cNvPr id="3" name="Content Placeholder 2">
             <a:extLst>
               <a:ext uri="{FF2B5EF4-FFF2-40B4-BE49-F238E27FC236}">
-                <a16:creationId xmlns:a16="http://schemas.microsoft.com/office/drawing/2014/main" id="{81823D4C-0DD9-DFEC-4859-8664C266C2EE}"/>
+                <a16:creationId xmlns:a16="http://schemas.microsoft.com/office/drawing/2014/main" id="{B4365EF4-2D5E-5CCF-31CD-DB59F3AF837E}"/>
               </a:ext>
             </a:extLst>
           </p:cNvPr>
@@ -840,7 +840,7 @@
           <p:cNvPr id="4" name="Date Placeholder 3">
             <a:extLst>
               <a:ext uri="{FF2B5EF4-FFF2-40B4-BE49-F238E27FC236}">
-                <a16:creationId xmlns:a16="http://schemas.microsoft.com/office/drawing/2014/main" id="{AB4C56E4-4CB1-FF33-1584-A83FC202C0CE}"/>
+                <a16:creationId xmlns:a16="http://schemas.microsoft.com/office/drawing/2014/main" id="{F9C3BB02-3DA7-8099-7471-3E6E66A775D5}"/>
               </a:ext>
             </a:extLst>
           </p:cNvPr>
@@ -856,9 +856,9 @@
           <a:bodyPr/>
           <a:lstStyle/>
           <a:p>
-            <a:fld id="{3DE2E1D5-A90B-45F4-80DF-D7994070D3D2}" type="datetimeFigureOut">
+            <a:fld id="{CBFBF2EA-DCA5-4BA8-BC03-B27E08876126}" type="datetimeFigureOut">
               <a:rPr lang="en-US" smtClean="0"/>
-              <a:t>7/18/2022</a:t>
+              <a:t>5/17/2026</a:t>
             </a:fld>
             <a:endParaRPr lang="en-US"/>
           </a:p>
@@ -869,7 +869,7 @@
           <p:cNvPr id="5" name="Footer Placeholder 4">
             <a:extLst>
               <a:ext uri="{FF2B5EF4-FFF2-40B4-BE49-F238E27FC236}">
-                <a16:creationId xmlns:a16="http://schemas.microsoft.com/office/drawing/2014/main" id="{DF1D7D53-CC7F-BE87-F0F5-C4A385BC0206}"/>
+                <a16:creationId xmlns:a16="http://schemas.microsoft.com/office/drawing/2014/main" id="{7BF2FBBC-D567-E021-FCDB-9350331BA369}"/>
               </a:ext>
             </a:extLst>
           </p:cNvPr>
@@ -894,7 +894,7 @@
           <p:cNvPr id="6" name="Slide Number Placeholder 5">
             <a:extLst>
               <a:ext uri="{FF2B5EF4-FFF2-40B4-BE49-F238E27FC236}">
-                <a16:creationId xmlns:a16="http://schemas.microsoft.com/office/drawing/2014/main" id="{9208C9BF-5F9E-C89C-5973-EC13237BD871}"/>
+                <a16:creationId xmlns:a16="http://schemas.microsoft.com/office/drawing/2014/main" id="{FB505438-91B9-C0AA-5071-43FDF38C128B}"/>
               </a:ext>
             </a:extLst>
           </p:cNvPr>
@@ -910,7 +910,7 @@
           <a:bodyPr/>
           <a:lstStyle/>
           <a:p>
-            <a:fld id="{3E73AC30-073E-4CD1-993C-6630E79B55A9}" type="slidenum">
+            <a:fld id="{3627C499-8D20-466E-8BD2-CC7391BCFA86}" type="slidenum">
               <a:rPr lang="en-US" smtClean="0"/>
               <a:t>‹#›</a:t>
             </a:fld>
@@ -921,7 +921,7 @@
     </p:spTree>
     <p:extLst>
       <p:ext uri="{BB962C8B-B14F-4D97-AF65-F5344CB8AC3E}">
-        <p14:creationId xmlns:p14="http://schemas.microsoft.com/office/powerpoint/2010/main" val="1551911237"/>
+        <p14:creationId xmlns:p14="http://schemas.microsoft.com/office/powerpoint/2010/main" val="3310149106"/>
       </p:ext>
     </p:extLst>
   </p:cSld>
@@ -953,7 +953,7 @@
           <p:cNvPr id="2" name="Title 1">
             <a:extLst>
               <a:ext uri="{FF2B5EF4-FFF2-40B4-BE49-F238E27FC236}">
-                <a16:creationId xmlns:a16="http://schemas.microsoft.com/office/drawing/2014/main" id="{D5248114-ED25-49F3-711F-B1C95A1C7876}"/>
+                <a16:creationId xmlns:a16="http://schemas.microsoft.com/office/drawing/2014/main" id="{BCEE7303-4E59-9D77-F7FD-DB9F694C8AEA}"/>
               </a:ext>
             </a:extLst>
           </p:cNvPr>
@@ -990,7 +990,7 @@
           <p:cNvPr id="3" name="Text Placeholder 2">
             <a:extLst>
               <a:ext uri="{FF2B5EF4-FFF2-40B4-BE49-F238E27FC236}">
-                <a16:creationId xmlns:a16="http://schemas.microsoft.com/office/drawing/2014/main" id="{E5E7FACC-2928-FA50-E74D-482FF7B63660}"/>
+                <a16:creationId xmlns:a16="http://schemas.microsoft.com/office/drawing/2014/main" id="{972E64FE-3959-3A5F-E3F0-64AC151D7713}"/>
               </a:ext>
             </a:extLst>
           </p:cNvPr>
@@ -1015,7 +1015,7 @@
               <a:defRPr sz="2400">
                 <a:solidFill>
                   <a:schemeClr val="tx1">
-                    <a:tint val="75000"/>
+                    <a:tint val="82000"/>
                   </a:schemeClr>
                 </a:solidFill>
               </a:defRPr>
@@ -1025,7 +1025,7 @@
               <a:defRPr sz="2000">
                 <a:solidFill>
                   <a:schemeClr val="tx1">
-                    <a:tint val="75000"/>
+                    <a:tint val="82000"/>
                   </a:schemeClr>
                 </a:solidFill>
               </a:defRPr>
@@ -1035,7 +1035,7 @@
               <a:defRPr sz="1800">
                 <a:solidFill>
                   <a:schemeClr val="tx1">
-                    <a:tint val="75000"/>
+                    <a:tint val="82000"/>
                   </a:schemeClr>
                 </a:solidFill>
               </a:defRPr>
@@ -1045,7 +1045,7 @@
               <a:defRPr sz="1600">
                 <a:solidFill>
                   <a:schemeClr val="tx1">
-                    <a:tint val="75000"/>
+                    <a:tint val="82000"/>
                   </a:schemeClr>
                 </a:solidFill>
               </a:defRPr>
@@ -1055,7 +1055,7 @@
               <a:defRPr sz="1600">
                 <a:solidFill>
                   <a:schemeClr val="tx1">
-                    <a:tint val="75000"/>
+                    <a:tint val="82000"/>
                   </a:schemeClr>
                 </a:solidFill>
               </a:defRPr>
@@ -1065,7 +1065,7 @@
               <a:defRPr sz="1600">
                 <a:solidFill>
                   <a:schemeClr val="tx1">
-                    <a:tint val="75000"/>
+                    <a:tint val="82000"/>
                   </a:schemeClr>
                 </a:solidFill>
               </a:defRPr>
@@ -1075,7 +1075,7 @@
               <a:defRPr sz="1600">
                 <a:solidFill>
                   <a:schemeClr val="tx1">
-                    <a:tint val="75000"/>
+                    <a:tint val="82000"/>
                   </a:schemeClr>
                 </a:solidFill>
               </a:defRPr>
@@ -1085,7 +1085,7 @@
               <a:defRPr sz="1600">
                 <a:solidFill>
                   <a:schemeClr val="tx1">
-                    <a:tint val="75000"/>
+                    <a:tint val="82000"/>
                   </a:schemeClr>
                 </a:solidFill>
               </a:defRPr>
@@ -1095,7 +1095,7 @@
               <a:defRPr sz="1600">
                 <a:solidFill>
                   <a:schemeClr val="tx1">
-                    <a:tint val="75000"/>
+                    <a:tint val="82000"/>
                   </a:schemeClr>
                 </a:solidFill>
               </a:defRPr>
@@ -1115,7 +1115,7 @@
           <p:cNvPr id="4" name="Date Placeholder 3">
             <a:extLst>
               <a:ext uri="{FF2B5EF4-FFF2-40B4-BE49-F238E27FC236}">
-                <a16:creationId xmlns:a16="http://schemas.microsoft.com/office/drawing/2014/main" id="{BA5B3DF7-1536-155E-4D9B-FBE3FBF6FF04}"/>
+                <a16:creationId xmlns:a16="http://schemas.microsoft.com/office/drawing/2014/main" id="{D11045A4-A6A1-54A2-08BF-2801885775C3}"/>
               </a:ext>
             </a:extLst>
           </p:cNvPr>
@@ -1131,9 +1131,9 @@
           <a:bodyPr/>
           <a:lstStyle/>
           <a:p>
-            <a:fld id="{3DE2E1D5-A90B-45F4-80DF-D7994070D3D2}" type="datetimeFigureOut">
+            <a:fld id="{CBFBF2EA-DCA5-4BA8-BC03-B27E08876126}" type="datetimeFigureOut">
               <a:rPr lang="en-US" smtClean="0"/>
-              <a:t>7/18/2022</a:t>
+              <a:t>5/17/2026</a:t>
             </a:fld>
             <a:endParaRPr lang="en-US"/>
           </a:p>
@@ -1144,7 +1144,7 @@
           <p:cNvPr id="5" name="Footer Placeholder 4">
             <a:extLst>
               <a:ext uri="{FF2B5EF4-FFF2-40B4-BE49-F238E27FC236}">
-                <a16:creationId xmlns:a16="http://schemas.microsoft.com/office/drawing/2014/main" id="{6641858A-8972-A1C3-E957-69F62CBCE800}"/>
+                <a16:creationId xmlns:a16="http://schemas.microsoft.com/office/drawing/2014/main" id="{FD501E63-C3B2-F360-F287-14082ACDAB56}"/>
               </a:ext>
             </a:extLst>
           </p:cNvPr>
@@ -1169,7 +1169,7 @@
           <p:cNvPr id="6" name="Slide Number Placeholder 5">
             <a:extLst>
               <a:ext uri="{FF2B5EF4-FFF2-40B4-BE49-F238E27FC236}">
-                <a16:creationId xmlns:a16="http://schemas.microsoft.com/office/drawing/2014/main" id="{A88E9589-120F-17D4-96C1-69666576FB06}"/>
+                <a16:creationId xmlns:a16="http://schemas.microsoft.com/office/drawing/2014/main" id="{2D70D851-FE86-8506-361D-D9A957AD6722}"/>
               </a:ext>
             </a:extLst>
           </p:cNvPr>
@@ -1185,7 +1185,7 @@
           <a:bodyPr/>
           <a:lstStyle/>
           <a:p>
-            <a:fld id="{3E73AC30-073E-4CD1-993C-6630E79B55A9}" type="slidenum">
+            <a:fld id="{3627C499-8D20-466E-8BD2-CC7391BCFA86}" type="slidenum">
               <a:rPr lang="en-US" smtClean="0"/>
               <a:t>‹#›</a:t>
             </a:fld>
@@ -1196,7 +1196,7 @@
     </p:spTree>
     <p:extLst>
       <p:ext uri="{BB962C8B-B14F-4D97-AF65-F5344CB8AC3E}">
-        <p14:creationId xmlns:p14="http://schemas.microsoft.com/office/powerpoint/2010/main" val="562124950"/>
+        <p14:creationId xmlns:p14="http://schemas.microsoft.com/office/powerpoint/2010/main" val="631197965"/>
       </p:ext>
     </p:extLst>
   </p:cSld>
@@ -1228,7 +1228,7 @@
           <p:cNvPr id="2" name="Title 1">
             <a:extLst>
               <a:ext uri="{FF2B5EF4-FFF2-40B4-BE49-F238E27FC236}">
-                <a16:creationId xmlns:a16="http://schemas.microsoft.com/office/drawing/2014/main" id="{209A759D-A234-D1D7-5B75-4D4AEB4654DC}"/>
+                <a16:creationId xmlns:a16="http://schemas.microsoft.com/office/drawing/2014/main" id="{189BE50C-5A6D-6B25-512E-0A315FB0E2BE}"/>
               </a:ext>
             </a:extLst>
           </p:cNvPr>
@@ -1256,7 +1256,7 @@
           <p:cNvPr id="3" name="Content Placeholder 2">
             <a:extLst>
               <a:ext uri="{FF2B5EF4-FFF2-40B4-BE49-F238E27FC236}">
-                <a16:creationId xmlns:a16="http://schemas.microsoft.com/office/drawing/2014/main" id="{65823591-7564-24E5-CDFF-EB7A2AAB6078}"/>
+                <a16:creationId xmlns:a16="http://schemas.microsoft.com/office/drawing/2014/main" id="{59499F62-8AC3-46DD-1D91-B45D8DD32FC1}"/>
               </a:ext>
             </a:extLst>
           </p:cNvPr>
@@ -1318,7 +1318,7 @@
           <p:cNvPr id="4" name="Content Placeholder 3">
             <a:extLst>
               <a:ext uri="{FF2B5EF4-FFF2-40B4-BE49-F238E27FC236}">
-                <a16:creationId xmlns:a16="http://schemas.microsoft.com/office/drawing/2014/main" id="{B7FC8609-221E-05AE-6D3B-1E82C6999D77}"/>
+                <a16:creationId xmlns:a16="http://schemas.microsoft.com/office/drawing/2014/main" id="{FF63AC58-409D-3782-E8E4-E4BE83842EA8}"/>
               </a:ext>
             </a:extLst>
           </p:cNvPr>
@@ -1380,7 +1380,7 @@
           <p:cNvPr id="5" name="Date Placeholder 4">
             <a:extLst>
               <a:ext uri="{FF2B5EF4-FFF2-40B4-BE49-F238E27FC236}">
-                <a16:creationId xmlns:a16="http://schemas.microsoft.com/office/drawing/2014/main" id="{7E26AAAE-C4A4-BA74-4AC7-BE771CA762CF}"/>
+                <a16:creationId xmlns:a16="http://schemas.microsoft.com/office/drawing/2014/main" id="{F4F1BA71-2244-061B-5DB2-BBB2B6800A6A}"/>
               </a:ext>
             </a:extLst>
           </p:cNvPr>
@@ -1396,9 +1396,9 @@
           <a:bodyPr/>
           <a:lstStyle/>
           <a:p>
-            <a:fld id="{3DE2E1D5-A90B-45F4-80DF-D7994070D3D2}" type="datetimeFigureOut">
+            <a:fld id="{CBFBF2EA-DCA5-4BA8-BC03-B27E08876126}" type="datetimeFigureOut">
               <a:rPr lang="en-US" smtClean="0"/>
-              <a:t>7/18/2022</a:t>
+              <a:t>5/17/2026</a:t>
             </a:fld>
             <a:endParaRPr lang="en-US"/>
           </a:p>
@@ -1409,7 +1409,7 @@
           <p:cNvPr id="6" name="Footer Placeholder 5">
             <a:extLst>
               <a:ext uri="{FF2B5EF4-FFF2-40B4-BE49-F238E27FC236}">
-                <a16:creationId xmlns:a16="http://schemas.microsoft.com/office/drawing/2014/main" id="{B8D9803D-A039-CCD2-0CF4-E1D5ED794ED9}"/>
+                <a16:creationId xmlns:a16="http://schemas.microsoft.com/office/drawing/2014/main" id="{3540F95C-E0EC-4D24-E6AB-74E188C247DD}"/>
               </a:ext>
             </a:extLst>
           </p:cNvPr>
@@ -1434,7 +1434,7 @@
           <p:cNvPr id="7" name="Slide Number Placeholder 6">
             <a:extLst>
               <a:ext uri="{FF2B5EF4-FFF2-40B4-BE49-F238E27FC236}">
-                <a16:creationId xmlns:a16="http://schemas.microsoft.com/office/drawing/2014/main" id="{45272393-48EE-0F24-60C0-40AC76BA7808}"/>
+                <a16:creationId xmlns:a16="http://schemas.microsoft.com/office/drawing/2014/main" id="{F603F9DC-4A41-B7A6-C481-909F6F65F8BC}"/>
               </a:ext>
             </a:extLst>
           </p:cNvPr>
@@ -1450,7 +1450,7 @@
           <a:bodyPr/>
           <a:lstStyle/>
           <a:p>
-            <a:fld id="{3E73AC30-073E-4CD1-993C-6630E79B55A9}" type="slidenum">
+            <a:fld id="{3627C499-8D20-466E-8BD2-CC7391BCFA86}" type="slidenum">
               <a:rPr lang="en-US" smtClean="0"/>
               <a:t>‹#›</a:t>
             </a:fld>
@@ -1461,7 +1461,7 @@
     </p:spTree>
     <p:extLst>
       <p:ext uri="{BB962C8B-B14F-4D97-AF65-F5344CB8AC3E}">
-        <p14:creationId xmlns:p14="http://schemas.microsoft.com/office/powerpoint/2010/main" val="881252901"/>
+        <p14:creationId xmlns:p14="http://schemas.microsoft.com/office/powerpoint/2010/main" val="3708515932"/>
       </p:ext>
     </p:extLst>
   </p:cSld>
@@ -1493,7 +1493,7 @@
           <p:cNvPr id="2" name="Title 1">
             <a:extLst>
               <a:ext uri="{FF2B5EF4-FFF2-40B4-BE49-F238E27FC236}">
-                <a16:creationId xmlns:a16="http://schemas.microsoft.com/office/drawing/2014/main" id="{36E7CAAB-27D4-AC8C-10E7-3F9A54D4A1FB}"/>
+                <a16:creationId xmlns:a16="http://schemas.microsoft.com/office/drawing/2014/main" id="{6CF44740-259C-7EBD-4145-3F8EEF215DA4}"/>
               </a:ext>
             </a:extLst>
           </p:cNvPr>
@@ -1526,7 +1526,7 @@
           <p:cNvPr id="3" name="Text Placeholder 2">
             <a:extLst>
               <a:ext uri="{FF2B5EF4-FFF2-40B4-BE49-F238E27FC236}">
-                <a16:creationId xmlns:a16="http://schemas.microsoft.com/office/drawing/2014/main" id="{E3DA3115-2947-5BA6-BEEE-84E39B08833A}"/>
+                <a16:creationId xmlns:a16="http://schemas.microsoft.com/office/drawing/2014/main" id="{F48C6A2C-0CE0-BB83-ADD5-E856B44C0FD3}"/>
               </a:ext>
             </a:extLst>
           </p:cNvPr>
@@ -1597,7 +1597,7 @@
           <p:cNvPr id="4" name="Content Placeholder 3">
             <a:extLst>
               <a:ext uri="{FF2B5EF4-FFF2-40B4-BE49-F238E27FC236}">
-                <a16:creationId xmlns:a16="http://schemas.microsoft.com/office/drawing/2014/main" id="{3F07BDCB-B8D9-F34D-CC4F-EAB10D8E1294}"/>
+                <a16:creationId xmlns:a16="http://schemas.microsoft.com/office/drawing/2014/main" id="{C84D60C3-2313-1E31-A2A3-FC85F6E59573}"/>
               </a:ext>
             </a:extLst>
           </p:cNvPr>
@@ -1659,7 +1659,7 @@
           <p:cNvPr id="5" name="Text Placeholder 4">
             <a:extLst>
               <a:ext uri="{FF2B5EF4-FFF2-40B4-BE49-F238E27FC236}">
-                <a16:creationId xmlns:a16="http://schemas.microsoft.com/office/drawing/2014/main" id="{8B7D4B18-00D8-6E1E-0060-E3BA2136C675}"/>
+                <a16:creationId xmlns:a16="http://schemas.microsoft.com/office/drawing/2014/main" id="{11EE8482-9EAA-17AE-8A48-89D2CA7D509F}"/>
               </a:ext>
             </a:extLst>
           </p:cNvPr>
@@ -1730,7 +1730,7 @@
           <p:cNvPr id="6" name="Content Placeholder 5">
             <a:extLst>
               <a:ext uri="{FF2B5EF4-FFF2-40B4-BE49-F238E27FC236}">
-                <a16:creationId xmlns:a16="http://schemas.microsoft.com/office/drawing/2014/main" id="{9276DC19-722A-CCC7-5E02-AD655FA214E6}"/>
+                <a16:creationId xmlns:a16="http://schemas.microsoft.com/office/drawing/2014/main" id="{FE343C9E-A23E-4848-B44D-C7A7275EF81B}"/>
               </a:ext>
             </a:extLst>
           </p:cNvPr>
@@ -1792,7 +1792,7 @@
           <p:cNvPr id="7" name="Date Placeholder 6">
             <a:extLst>
               <a:ext uri="{FF2B5EF4-FFF2-40B4-BE49-F238E27FC236}">
-                <a16:creationId xmlns:a16="http://schemas.microsoft.com/office/drawing/2014/main" id="{6FBA9FF7-5FAF-86FA-AE2F-3D9D01CB3FD0}"/>
+                <a16:creationId xmlns:a16="http://schemas.microsoft.com/office/drawing/2014/main" id="{CFCD906D-F85D-D9F1-0043-4BD4C73F86BE}"/>
               </a:ext>
             </a:extLst>
           </p:cNvPr>
@@ -1808,9 +1808,9 @@
           <a:bodyPr/>
           <a:lstStyle/>
           <a:p>
-            <a:fld id="{3DE2E1D5-A90B-45F4-80DF-D7994070D3D2}" type="datetimeFigureOut">
+            <a:fld id="{CBFBF2EA-DCA5-4BA8-BC03-B27E08876126}" type="datetimeFigureOut">
               <a:rPr lang="en-US" smtClean="0"/>
-              <a:t>7/18/2022</a:t>
+              <a:t>5/17/2026</a:t>
             </a:fld>
             <a:endParaRPr lang="en-US"/>
           </a:p>
@@ -1821,7 +1821,7 @@
           <p:cNvPr id="8" name="Footer Placeholder 7">
             <a:extLst>
               <a:ext uri="{FF2B5EF4-FFF2-40B4-BE49-F238E27FC236}">
-                <a16:creationId xmlns:a16="http://schemas.microsoft.com/office/drawing/2014/main" id="{FED7A9FF-7FBA-8FBA-0B04-EFBCB0110B74}"/>
+                <a16:creationId xmlns:a16="http://schemas.microsoft.com/office/drawing/2014/main" id="{FDCBBFBC-4A2A-47FA-5BC5-9A5B9C47C760}"/>
               </a:ext>
             </a:extLst>
           </p:cNvPr>
@@ -1846,7 +1846,7 @@
           <p:cNvPr id="9" name="Slide Number Placeholder 8">
             <a:extLst>
               <a:ext uri="{FF2B5EF4-FFF2-40B4-BE49-F238E27FC236}">
-                <a16:creationId xmlns:a16="http://schemas.microsoft.com/office/drawing/2014/main" id="{B554A064-F23E-0219-91A2-8D4C6CD1A5D4}"/>
+                <a16:creationId xmlns:a16="http://schemas.microsoft.com/office/drawing/2014/main" id="{8F21AFCC-4F24-8360-1CCE-148E0E841285}"/>
               </a:ext>
             </a:extLst>
           </p:cNvPr>
@@ -1862,7 +1862,7 @@
           <a:bodyPr/>
           <a:lstStyle/>
           <a:p>
-            <a:fld id="{3E73AC30-073E-4CD1-993C-6630E79B55A9}" type="slidenum">
+            <a:fld id="{3627C499-8D20-466E-8BD2-CC7391BCFA86}" type="slidenum">
               <a:rPr lang="en-US" smtClean="0"/>
               <a:t>‹#›</a:t>
             </a:fld>
@@ -1873,7 +1873,7 @@
     </p:spTree>
     <p:extLst>
       <p:ext uri="{BB962C8B-B14F-4D97-AF65-F5344CB8AC3E}">
-        <p14:creationId xmlns:p14="http://schemas.microsoft.com/office/powerpoint/2010/main" val="1327943044"/>
+        <p14:creationId xmlns:p14="http://schemas.microsoft.com/office/powerpoint/2010/main" val="1856869936"/>
       </p:ext>
     </p:extLst>
   </p:cSld>
@@ -1905,7 +1905,7 @@
           <p:cNvPr id="2" name="Title 1">
             <a:extLst>
               <a:ext uri="{FF2B5EF4-FFF2-40B4-BE49-F238E27FC236}">
-                <a16:creationId xmlns:a16="http://schemas.microsoft.com/office/drawing/2014/main" id="{C6414F0C-462B-57A4-FC74-8523DC024052}"/>
+                <a16:creationId xmlns:a16="http://schemas.microsoft.com/office/drawing/2014/main" id="{054C18DC-45D1-9521-E872-7AAAF41F3D5E}"/>
               </a:ext>
             </a:extLst>
           </p:cNvPr>
@@ -1933,7 +1933,7 @@
           <p:cNvPr id="3" name="Date Placeholder 2">
             <a:extLst>
               <a:ext uri="{FF2B5EF4-FFF2-40B4-BE49-F238E27FC236}">
-                <a16:creationId xmlns:a16="http://schemas.microsoft.com/office/drawing/2014/main" id="{0F681C8B-214C-D6F9-8706-802C5985BB82}"/>
+                <a16:creationId xmlns:a16="http://schemas.microsoft.com/office/drawing/2014/main" id="{E6844C03-175A-3D4B-A0D8-947155CBCFFC}"/>
               </a:ext>
             </a:extLst>
           </p:cNvPr>
@@ -1949,9 +1949,9 @@
           <a:bodyPr/>
           <a:lstStyle/>
           <a:p>
-            <a:fld id="{3DE2E1D5-A90B-45F4-80DF-D7994070D3D2}" type="datetimeFigureOut">
+            <a:fld id="{CBFBF2EA-DCA5-4BA8-BC03-B27E08876126}" type="datetimeFigureOut">
               <a:rPr lang="en-US" smtClean="0"/>
-              <a:t>7/18/2022</a:t>
+              <a:t>5/17/2026</a:t>
             </a:fld>
             <a:endParaRPr lang="en-US"/>
           </a:p>
@@ -1962,7 +1962,7 @@
           <p:cNvPr id="4" name="Footer Placeholder 3">
             <a:extLst>
               <a:ext uri="{FF2B5EF4-FFF2-40B4-BE49-F238E27FC236}">
-                <a16:creationId xmlns:a16="http://schemas.microsoft.com/office/drawing/2014/main" id="{FB16156C-D034-2F4A-97BE-737F3EA3D330}"/>
+                <a16:creationId xmlns:a16="http://schemas.microsoft.com/office/drawing/2014/main" id="{9D4E4DA1-E568-6F6B-0B18-713E9A17157D}"/>
               </a:ext>
             </a:extLst>
           </p:cNvPr>
@@ -1987,7 +1987,7 @@
           <p:cNvPr id="5" name="Slide Number Placeholder 4">
             <a:extLst>
               <a:ext uri="{FF2B5EF4-FFF2-40B4-BE49-F238E27FC236}">
-                <a16:creationId xmlns:a16="http://schemas.microsoft.com/office/drawing/2014/main" id="{E07DD455-01E1-E2D4-544F-03DF215D1BCA}"/>
+                <a16:creationId xmlns:a16="http://schemas.microsoft.com/office/drawing/2014/main" id="{FC043214-E886-5227-F364-931C5FC20974}"/>
               </a:ext>
             </a:extLst>
           </p:cNvPr>
@@ -2003,7 +2003,7 @@
           <a:bodyPr/>
           <a:lstStyle/>
           <a:p>
-            <a:fld id="{3E73AC30-073E-4CD1-993C-6630E79B55A9}" type="slidenum">
+            <a:fld id="{3627C499-8D20-466E-8BD2-CC7391BCFA86}" type="slidenum">
               <a:rPr lang="en-US" smtClean="0"/>
               <a:t>‹#›</a:t>
             </a:fld>
@@ -2014,7 +2014,7 @@
     </p:spTree>
     <p:extLst>
       <p:ext uri="{BB962C8B-B14F-4D97-AF65-F5344CB8AC3E}">
-        <p14:creationId xmlns:p14="http://schemas.microsoft.com/office/powerpoint/2010/main" val="3606370043"/>
+        <p14:creationId xmlns:p14="http://schemas.microsoft.com/office/powerpoint/2010/main" val="2019301324"/>
       </p:ext>
     </p:extLst>
   </p:cSld>
@@ -2046,7 +2046,7 @@
           <p:cNvPr id="2" name="Date Placeholder 1">
             <a:extLst>
               <a:ext uri="{FF2B5EF4-FFF2-40B4-BE49-F238E27FC236}">
-                <a16:creationId xmlns:a16="http://schemas.microsoft.com/office/drawing/2014/main" id="{5F79BE06-C6A5-085D-25BA-8BFFD0FAD03C}"/>
+                <a16:creationId xmlns:a16="http://schemas.microsoft.com/office/drawing/2014/main" id="{35CC6EF0-CB4E-B8A4-F7D5-3BAAF992226E}"/>
               </a:ext>
             </a:extLst>
           </p:cNvPr>
@@ -2062,9 +2062,9 @@
           <a:bodyPr/>
           <a:lstStyle/>
           <a:p>
-            <a:fld id="{3DE2E1D5-A90B-45F4-80DF-D7994070D3D2}" type="datetimeFigureOut">
+            <a:fld id="{CBFBF2EA-DCA5-4BA8-BC03-B27E08876126}" type="datetimeFigureOut">
               <a:rPr lang="en-US" smtClean="0"/>
-              <a:t>7/18/2022</a:t>
+              <a:t>5/17/2026</a:t>
             </a:fld>
             <a:endParaRPr lang="en-US"/>
           </a:p>
@@ -2075,7 +2075,7 @@
           <p:cNvPr id="3" name="Footer Placeholder 2">
             <a:extLst>
               <a:ext uri="{FF2B5EF4-FFF2-40B4-BE49-F238E27FC236}">
-                <a16:creationId xmlns:a16="http://schemas.microsoft.com/office/drawing/2014/main" id="{EA7605FD-3525-C414-9094-71C31A160B6D}"/>
+                <a16:creationId xmlns:a16="http://schemas.microsoft.com/office/drawing/2014/main" id="{517C08A1-7A21-A673-38B4-1F10E8478D11}"/>
               </a:ext>
             </a:extLst>
           </p:cNvPr>
@@ -2100,7 +2100,7 @@
           <p:cNvPr id="4" name="Slide Number Placeholder 3">
             <a:extLst>
               <a:ext uri="{FF2B5EF4-FFF2-40B4-BE49-F238E27FC236}">
-                <a16:creationId xmlns:a16="http://schemas.microsoft.com/office/drawing/2014/main" id="{6EC2A38A-C042-A814-F3CD-355246FF5584}"/>
+                <a16:creationId xmlns:a16="http://schemas.microsoft.com/office/drawing/2014/main" id="{2E6A02A2-38DB-0CBA-7352-B5BEAAA5538C}"/>
               </a:ext>
             </a:extLst>
           </p:cNvPr>
@@ -2116,7 +2116,7 @@
           <a:bodyPr/>
           <a:lstStyle/>
           <a:p>
-            <a:fld id="{3E73AC30-073E-4CD1-993C-6630E79B55A9}" type="slidenum">
+            <a:fld id="{3627C499-8D20-466E-8BD2-CC7391BCFA86}" type="slidenum">
               <a:rPr lang="en-US" smtClean="0"/>
               <a:t>‹#›</a:t>
             </a:fld>
@@ -2127,7 +2127,7 @@
     </p:spTree>
     <p:extLst>
       <p:ext uri="{BB962C8B-B14F-4D97-AF65-F5344CB8AC3E}">
-        <p14:creationId xmlns:p14="http://schemas.microsoft.com/office/powerpoint/2010/main" val="3471356007"/>
+        <p14:creationId xmlns:p14="http://schemas.microsoft.com/office/powerpoint/2010/main" val="3445183269"/>
       </p:ext>
     </p:extLst>
   </p:cSld>
@@ -2159,7 +2159,7 @@
           <p:cNvPr id="2" name="Title 1">
             <a:extLst>
               <a:ext uri="{FF2B5EF4-FFF2-40B4-BE49-F238E27FC236}">
-                <a16:creationId xmlns:a16="http://schemas.microsoft.com/office/drawing/2014/main" id="{AF81AED3-55E4-F6C6-99FE-98ABAE6641C1}"/>
+                <a16:creationId xmlns:a16="http://schemas.microsoft.com/office/drawing/2014/main" id="{7318DBAC-80D4-EECD-C743-723C11094B4C}"/>
               </a:ext>
             </a:extLst>
           </p:cNvPr>
@@ -2196,7 +2196,7 @@
           <p:cNvPr id="3" name="Content Placeholder 2">
             <a:extLst>
               <a:ext uri="{FF2B5EF4-FFF2-40B4-BE49-F238E27FC236}">
-                <a16:creationId xmlns:a16="http://schemas.microsoft.com/office/drawing/2014/main" id="{0B485EE9-13FF-5167-6672-451BE32DAC38}"/>
+                <a16:creationId xmlns:a16="http://schemas.microsoft.com/office/drawing/2014/main" id="{263868BF-E5CA-1822-EC22-635D8D41E501}"/>
               </a:ext>
             </a:extLst>
           </p:cNvPr>
@@ -2286,7 +2286,7 @@
           <p:cNvPr id="4" name="Text Placeholder 3">
             <a:extLst>
               <a:ext uri="{FF2B5EF4-FFF2-40B4-BE49-F238E27FC236}">
-                <a16:creationId xmlns:a16="http://schemas.microsoft.com/office/drawing/2014/main" id="{00B39E83-C23D-CF40-6074-90A964F1521F}"/>
+                <a16:creationId xmlns:a16="http://schemas.microsoft.com/office/drawing/2014/main" id="{2C5D33F2-2812-AFC7-7B83-7130B2F1DAD6}"/>
               </a:ext>
             </a:extLst>
           </p:cNvPr>
@@ -2357,7 +2357,7 @@
           <p:cNvPr id="5" name="Date Placeholder 4">
             <a:extLst>
               <a:ext uri="{FF2B5EF4-FFF2-40B4-BE49-F238E27FC236}">
-                <a16:creationId xmlns:a16="http://schemas.microsoft.com/office/drawing/2014/main" id="{53FE6B5C-AAC9-E3AA-ACE7-58EA5950FD25}"/>
+                <a16:creationId xmlns:a16="http://schemas.microsoft.com/office/drawing/2014/main" id="{92719DB1-B0FA-A55A-DF94-0DB1DC7000C4}"/>
               </a:ext>
             </a:extLst>
           </p:cNvPr>
@@ -2373,9 +2373,9 @@
           <a:bodyPr/>
           <a:lstStyle/>
           <a:p>
-            <a:fld id="{3DE2E1D5-A90B-45F4-80DF-D7994070D3D2}" type="datetimeFigureOut">
+            <a:fld id="{CBFBF2EA-DCA5-4BA8-BC03-B27E08876126}" type="datetimeFigureOut">
               <a:rPr lang="en-US" smtClean="0"/>
-              <a:t>7/18/2022</a:t>
+              <a:t>5/17/2026</a:t>
             </a:fld>
             <a:endParaRPr lang="en-US"/>
           </a:p>
@@ -2386,7 +2386,7 @@
           <p:cNvPr id="6" name="Footer Placeholder 5">
             <a:extLst>
               <a:ext uri="{FF2B5EF4-FFF2-40B4-BE49-F238E27FC236}">
-                <a16:creationId xmlns:a16="http://schemas.microsoft.com/office/drawing/2014/main" id="{C7BB4320-C435-E055-F823-3BFAAB2CCAAC}"/>
+                <a16:creationId xmlns:a16="http://schemas.microsoft.com/office/drawing/2014/main" id="{BCD90734-A729-147F-4AFD-24941553A128}"/>
               </a:ext>
             </a:extLst>
           </p:cNvPr>
@@ -2411,7 +2411,7 @@
           <p:cNvPr id="7" name="Slide Number Placeholder 6">
             <a:extLst>
               <a:ext uri="{FF2B5EF4-FFF2-40B4-BE49-F238E27FC236}">
-                <a16:creationId xmlns:a16="http://schemas.microsoft.com/office/drawing/2014/main" id="{B1C126EE-2DE1-4089-E9E3-52FCD92A5857}"/>
+                <a16:creationId xmlns:a16="http://schemas.microsoft.com/office/drawing/2014/main" id="{47F0ADBE-4D14-83CE-913F-BA5B1D98F9AF}"/>
               </a:ext>
             </a:extLst>
           </p:cNvPr>
@@ -2427,7 +2427,7 @@
           <a:bodyPr/>
           <a:lstStyle/>
           <a:p>
-            <a:fld id="{3E73AC30-073E-4CD1-993C-6630E79B55A9}" type="slidenum">
+            <a:fld id="{3627C499-8D20-466E-8BD2-CC7391BCFA86}" type="slidenum">
               <a:rPr lang="en-US" smtClean="0"/>
               <a:t>‹#›</a:t>
             </a:fld>
@@ -2438,7 +2438,7 @@
     </p:spTree>
     <p:extLst>
       <p:ext uri="{BB962C8B-B14F-4D97-AF65-F5344CB8AC3E}">
-        <p14:creationId xmlns:p14="http://schemas.microsoft.com/office/powerpoint/2010/main" val="2947081832"/>
+        <p14:creationId xmlns:p14="http://schemas.microsoft.com/office/powerpoint/2010/main" val="657629408"/>
       </p:ext>
     </p:extLst>
   </p:cSld>
@@ -2470,7 +2470,7 @@
           <p:cNvPr id="2" name="Title 1">
             <a:extLst>
               <a:ext uri="{FF2B5EF4-FFF2-40B4-BE49-F238E27FC236}">
-                <a16:creationId xmlns:a16="http://schemas.microsoft.com/office/drawing/2014/main" id="{49714CC3-92CC-18CA-845C-5C94A8A20700}"/>
+                <a16:creationId xmlns:a16="http://schemas.microsoft.com/office/drawing/2014/main" id="{B6325B74-B860-B4D7-7889-65C92346CDA0}"/>
               </a:ext>
             </a:extLst>
           </p:cNvPr>
@@ -2507,7 +2507,7 @@
           <p:cNvPr id="3" name="Picture Placeholder 2">
             <a:extLst>
               <a:ext uri="{FF2B5EF4-FFF2-40B4-BE49-F238E27FC236}">
-                <a16:creationId xmlns:a16="http://schemas.microsoft.com/office/drawing/2014/main" id="{35FF043A-68B1-C0A2-5FE7-E44EF27F82F9}"/>
+                <a16:creationId xmlns:a16="http://schemas.microsoft.com/office/drawing/2014/main" id="{08BDCCED-4AF0-8D2E-ECBC-F7C531CE4895}"/>
               </a:ext>
             </a:extLst>
           </p:cNvPr>
@@ -2574,7 +2574,7 @@
           <p:cNvPr id="4" name="Text Placeholder 3">
             <a:extLst>
               <a:ext uri="{FF2B5EF4-FFF2-40B4-BE49-F238E27FC236}">
-                <a16:creationId xmlns:a16="http://schemas.microsoft.com/office/drawing/2014/main" id="{392D94C9-82FB-CCD4-A059-C524FAB8FF00}"/>
+                <a16:creationId xmlns:a16="http://schemas.microsoft.com/office/drawing/2014/main" id="{BC61FBD8-0F26-186E-2B11-B11BA317D2ED}"/>
               </a:ext>
             </a:extLst>
           </p:cNvPr>
@@ -2645,7 +2645,7 @@
           <p:cNvPr id="5" name="Date Placeholder 4">
             <a:extLst>
               <a:ext uri="{FF2B5EF4-FFF2-40B4-BE49-F238E27FC236}">
-                <a16:creationId xmlns:a16="http://schemas.microsoft.com/office/drawing/2014/main" id="{C1844377-7966-FB92-A4C2-CB5279175EF8}"/>
+                <a16:creationId xmlns:a16="http://schemas.microsoft.com/office/drawing/2014/main" id="{BD8360FA-B100-EDB8-9DB3-46B8830FA0AF}"/>
               </a:ext>
             </a:extLst>
           </p:cNvPr>
@@ -2661,9 +2661,9 @@
           <a:bodyPr/>
           <a:lstStyle/>
           <a:p>
-            <a:fld id="{3DE2E1D5-A90B-45F4-80DF-D7994070D3D2}" type="datetimeFigureOut">
+            <a:fld id="{CBFBF2EA-DCA5-4BA8-BC03-B27E08876126}" type="datetimeFigureOut">
               <a:rPr lang="en-US" smtClean="0"/>
-              <a:t>7/18/2022</a:t>
+              <a:t>5/17/2026</a:t>
             </a:fld>
             <a:endParaRPr lang="en-US"/>
           </a:p>
@@ -2674,7 +2674,7 @@
           <p:cNvPr id="6" name="Footer Placeholder 5">
             <a:extLst>
               <a:ext uri="{FF2B5EF4-FFF2-40B4-BE49-F238E27FC236}">
-                <a16:creationId xmlns:a16="http://schemas.microsoft.com/office/drawing/2014/main" id="{21D4CA13-07B6-FE2B-D731-F1BFBEDD488A}"/>
+                <a16:creationId xmlns:a16="http://schemas.microsoft.com/office/drawing/2014/main" id="{576BE76A-8481-08B4-519A-1400FD54BB61}"/>
               </a:ext>
             </a:extLst>
           </p:cNvPr>
@@ -2699,7 +2699,7 @@
           <p:cNvPr id="7" name="Slide Number Placeholder 6">
             <a:extLst>
               <a:ext uri="{FF2B5EF4-FFF2-40B4-BE49-F238E27FC236}">
-                <a16:creationId xmlns:a16="http://schemas.microsoft.com/office/drawing/2014/main" id="{B52D5683-3DAA-9656-08A9-B7DD1106B1F8}"/>
+                <a16:creationId xmlns:a16="http://schemas.microsoft.com/office/drawing/2014/main" id="{23BD036F-40DC-6B2F-94A5-097AE411CF8C}"/>
               </a:ext>
             </a:extLst>
           </p:cNvPr>
@@ -2715,7 +2715,7 @@
           <a:bodyPr/>
           <a:lstStyle/>
           <a:p>
-            <a:fld id="{3E73AC30-073E-4CD1-993C-6630E79B55A9}" type="slidenum">
+            <a:fld id="{3627C499-8D20-466E-8BD2-CC7391BCFA86}" type="slidenum">
               <a:rPr lang="en-US" smtClean="0"/>
               <a:t>‹#›</a:t>
             </a:fld>
@@ -2726,7 +2726,7 @@
     </p:spTree>
     <p:extLst>
       <p:ext uri="{BB962C8B-B14F-4D97-AF65-F5344CB8AC3E}">
-        <p14:creationId xmlns:p14="http://schemas.microsoft.com/office/powerpoint/2010/main" val="2332730845"/>
+        <p14:creationId xmlns:p14="http://schemas.microsoft.com/office/powerpoint/2010/main" val="4268486611"/>
       </p:ext>
     </p:extLst>
   </p:cSld>
@@ -2763,7 +2763,7 @@
           <p:cNvPr id="2" name="Title Placeholder 1">
             <a:extLst>
               <a:ext uri="{FF2B5EF4-FFF2-40B4-BE49-F238E27FC236}">
-                <a16:creationId xmlns:a16="http://schemas.microsoft.com/office/drawing/2014/main" id="{577EEA32-40F2-D70D-7738-A3BDFCD39D59}"/>
+                <a16:creationId xmlns:a16="http://schemas.microsoft.com/office/drawing/2014/main" id="{7816332C-725E-A077-0F9D-D3FA50292A50}"/>
               </a:ext>
             </a:extLst>
           </p:cNvPr>
@@ -2801,7 +2801,7 @@
           <p:cNvPr id="3" name="Text Placeholder 2">
             <a:extLst>
               <a:ext uri="{FF2B5EF4-FFF2-40B4-BE49-F238E27FC236}">
-                <a16:creationId xmlns:a16="http://schemas.microsoft.com/office/drawing/2014/main" id="{0184801B-3917-2D03-60EA-F4423532F06E}"/>
+                <a16:creationId xmlns:a16="http://schemas.microsoft.com/office/drawing/2014/main" id="{F41D85DD-9566-12CB-100B-E383B51477CF}"/>
               </a:ext>
             </a:extLst>
           </p:cNvPr>
@@ -2868,7 +2868,7 @@
           <p:cNvPr id="4" name="Date Placeholder 3">
             <a:extLst>
               <a:ext uri="{FF2B5EF4-FFF2-40B4-BE49-F238E27FC236}">
-                <a16:creationId xmlns:a16="http://schemas.microsoft.com/office/drawing/2014/main" id="{C4551304-54AB-078D-E6FF-184B61A003CE}"/>
+                <a16:creationId xmlns:a16="http://schemas.microsoft.com/office/drawing/2014/main" id="{6A3B2107-9550-12C3-DF0F-262C421399F2}"/>
               </a:ext>
             </a:extLst>
           </p:cNvPr>
@@ -2895,16 +2895,16 @@
               <a:defRPr sz="1200">
                 <a:solidFill>
                   <a:schemeClr val="tx1">
-                    <a:tint val="75000"/>
+                    <a:tint val="82000"/>
                   </a:schemeClr>
                 </a:solidFill>
               </a:defRPr>
             </a:lvl1pPr>
           </a:lstStyle>
           <a:p>
-            <a:fld id="{3DE2E1D5-A90B-45F4-80DF-D7994070D3D2}" type="datetimeFigureOut">
+            <a:fld id="{CBFBF2EA-DCA5-4BA8-BC03-B27E08876126}" type="datetimeFigureOut">
               <a:rPr lang="en-US" smtClean="0"/>
-              <a:t>7/18/2022</a:t>
+              <a:t>5/17/2026</a:t>
             </a:fld>
             <a:endParaRPr lang="en-US"/>
           </a:p>
@@ -2915,7 +2915,7 @@
           <p:cNvPr id="5" name="Footer Placeholder 4">
             <a:extLst>
               <a:ext uri="{FF2B5EF4-FFF2-40B4-BE49-F238E27FC236}">
-                <a16:creationId xmlns:a16="http://schemas.microsoft.com/office/drawing/2014/main" id="{4B95AA8E-637C-FA23-EF8D-3C5BF6CA838C}"/>
+                <a16:creationId xmlns:a16="http://schemas.microsoft.com/office/drawing/2014/main" id="{024D7699-4DEA-E741-3E79-67025D72E959}"/>
               </a:ext>
             </a:extLst>
           </p:cNvPr>
@@ -2942,7 +2942,7 @@
               <a:defRPr sz="1200">
                 <a:solidFill>
                   <a:schemeClr val="tx1">
-                    <a:tint val="75000"/>
+                    <a:tint val="82000"/>
                   </a:schemeClr>
                 </a:solidFill>
               </a:defRPr>
@@ -2958,7 +2958,7 @@
           <p:cNvPr id="6" name="Slide Number Placeholder 5">
             <a:extLst>
               <a:ext uri="{FF2B5EF4-FFF2-40B4-BE49-F238E27FC236}">
-                <a16:creationId xmlns:a16="http://schemas.microsoft.com/office/drawing/2014/main" id="{659A0F0F-4472-0818-14CB-53908E7DD79E}"/>
+                <a16:creationId xmlns:a16="http://schemas.microsoft.com/office/drawing/2014/main" id="{D0EA8D6F-E027-98CD-1FFD-777F66776ABD}"/>
               </a:ext>
             </a:extLst>
           </p:cNvPr>
@@ -2985,14 +2985,14 @@
               <a:defRPr sz="1200">
                 <a:solidFill>
                   <a:schemeClr val="tx1">
-                    <a:tint val="75000"/>
+                    <a:tint val="82000"/>
                   </a:schemeClr>
                 </a:solidFill>
               </a:defRPr>
             </a:lvl1pPr>
           </a:lstStyle>
           <a:p>
-            <a:fld id="{3E73AC30-073E-4CD1-993C-6630E79B55A9}" type="slidenum">
+            <a:fld id="{3627C499-8D20-466E-8BD2-CC7391BCFA86}" type="slidenum">
               <a:rPr lang="en-US" smtClean="0"/>
               <a:t>‹#›</a:t>
             </a:fld>
@@ -3003,7 +3003,7 @@
     </p:spTree>
     <p:extLst>
       <p:ext uri="{BB962C8B-B14F-4D97-AF65-F5344CB8AC3E}">
-        <p14:creationId xmlns:p14="http://schemas.microsoft.com/office/powerpoint/2010/main" val="1506460411"/>
+        <p14:creationId xmlns:p14="http://schemas.microsoft.com/office/powerpoint/2010/main" val="2161997589"/>
       </p:ext>
     </p:extLst>
   </p:cSld>
@@ -3326,7 +3326,7 @@
           <p:cNvPr id="2" name="Title 1">
             <a:extLst>
               <a:ext uri="{FF2B5EF4-FFF2-40B4-BE49-F238E27FC236}">
-                <a16:creationId xmlns:a16="http://schemas.microsoft.com/office/drawing/2014/main" id="{819EC8DF-8615-23D8-3628-9CF3B062BA50}"/>
+                <a16:creationId xmlns:a16="http://schemas.microsoft.com/office/drawing/2014/main" id="{F08F2F19-F343-0925-90A5-853E1C5C51BB}"/>
               </a:ext>
             </a:extLst>
           </p:cNvPr>
@@ -3354,7 +3354,7 @@
           <p:cNvPr id="3" name="Content Placeholder 2">
             <a:extLst>
               <a:ext uri="{FF2B5EF4-FFF2-40B4-BE49-F238E27FC236}">
-                <a16:creationId xmlns:a16="http://schemas.microsoft.com/office/drawing/2014/main" id="{E5DA9588-A934-7DAB-C60F-4140F2BEB0B2}"/>
+                <a16:creationId xmlns:a16="http://schemas.microsoft.com/office/drawing/2014/main" id="{7786A774-C085-F3CF-0DFB-52CB6372C0EF}"/>
               </a:ext>
             </a:extLst>
           </p:cNvPr>
@@ -3377,7 +3377,7 @@
     </p:spTree>
     <p:extLst>
       <p:ext uri="{BB962C8B-B14F-4D97-AF65-F5344CB8AC3E}">
-        <p14:creationId xmlns:p14="http://schemas.microsoft.com/office/powerpoint/2010/main" val="223276996"/>
+        <p14:creationId xmlns:p14="http://schemas.microsoft.com/office/powerpoint/2010/main" val="563397346"/>
       </p:ext>
     </p:extLst>
   </p:cSld>
@@ -3398,39 +3398,39 @@
         <a:sysClr val="window" lastClr="FFFFFF"/>
       </a:lt1>
       <a:dk2>
-        <a:srgbClr val="44546A"/>
+        <a:srgbClr val="0E2841"/>
       </a:dk2>
       <a:lt2>
-        <a:srgbClr val="E7E6E6"/>
+        <a:srgbClr val="E8E8E8"/>
       </a:lt2>
       <a:accent1>
-        <a:srgbClr val="4472C4"/>
+        <a:srgbClr val="156082"/>
       </a:accent1>
       <a:accent2>
-        <a:srgbClr val="ED7D31"/>
+        <a:srgbClr val="E97132"/>
       </a:accent2>
       <a:accent3>
-        <a:srgbClr val="A5A5A5"/>
+        <a:srgbClr val="196B24"/>
       </a:accent3>
       <a:accent4>
-        <a:srgbClr val="FFC000"/>
+        <a:srgbClr val="0F9ED5"/>
       </a:accent4>
       <a:accent5>
-        <a:srgbClr val="5B9BD5"/>
+        <a:srgbClr val="A02B93"/>
       </a:accent5>
       <a:accent6>
-        <a:srgbClr val="70AD47"/>
+        <a:srgbClr val="4EA72E"/>
       </a:accent6>
       <a:hlink>
-        <a:srgbClr val="0563C1"/>
+        <a:srgbClr val="467886"/>
       </a:hlink>
       <a:folHlink>
-        <a:srgbClr val="954F72"/>
+        <a:srgbClr val="96607D"/>
       </a:folHlink>
     </a:clrScheme>
     <a:fontScheme name="Office">
       <a:majorFont>
-        <a:latin typeface="Calibri Light" panose="020F0302020204030204"/>
+        <a:latin typeface="Aptos Display" panose="02110004020202020204"/>
         <a:ea typeface=""/>
         <a:cs typeface=""/>
         <a:font script="Jpan" typeface="游ゴシック Light"/>
@@ -3482,7 +3482,7 @@
         <a:font script="Tfng" typeface="Ebrima"/>
       </a:majorFont>
       <a:minorFont>
-        <a:latin typeface="Calibri" panose="020F0502020204030204"/>
+        <a:latin typeface="Aptos" panose="02110004020202020204"/>
         <a:ea typeface=""/>
         <a:cs typeface=""/>
         <a:font script="Jpan" typeface="游ゴシック"/>
@@ -3593,13 +3593,6 @@
         </a:gradFill>
       </a:fillStyleLst>
       <a:lnStyleLst>
-        <a:ln w="6350" cap="flat" cmpd="sng" algn="ctr">
-          <a:solidFill>
-            <a:schemeClr val="phClr"/>
-          </a:solidFill>
-          <a:prstDash val="solid"/>
-          <a:miter lim="800000"/>
-        </a:ln>
         <a:ln w="12700" cap="flat" cmpd="sng" algn="ctr">
           <a:solidFill>
             <a:schemeClr val="phClr"/>
@@ -3608,6 +3601,13 @@
           <a:miter lim="800000"/>
         </a:ln>
         <a:ln w="19050" cap="flat" cmpd="sng" algn="ctr">
+          <a:solidFill>
+            <a:schemeClr val="phClr"/>
+          </a:solidFill>
+          <a:prstDash val="solid"/>
+          <a:miter lim="800000"/>
+        </a:ln>
+        <a:ln w="25400" cap="flat" cmpd="sng" algn="ctr">
           <a:solidFill>
             <a:schemeClr val="phClr"/>
           </a:solidFill>
@@ -3672,11 +3672,31 @@
       </a:bgFillStyleLst>
     </a:fmtScheme>
   </a:themeElements>
-  <a:objectDefaults/>
+  <a:objectDefaults>
+    <a:lnDef>
+      <a:spPr/>
+      <a:bodyPr/>
+      <a:lstStyle/>
+      <a:style>
+        <a:lnRef idx="2">
+          <a:schemeClr val="accent1"/>
+        </a:lnRef>
+        <a:fillRef idx="0">
+          <a:schemeClr val="accent1"/>
+        </a:fillRef>
+        <a:effectRef idx="1">
+          <a:schemeClr val="accent1"/>
+        </a:effectRef>
+        <a:fontRef idx="minor">
+          <a:schemeClr val="tx1"/>
+        </a:fontRef>
+      </a:style>
+    </a:lnDef>
+  </a:objectDefaults>
   <a:extraClrSchemeLst/>
   <a:extLst>
     <a:ext uri="{05A4C25C-085E-4340-85A3-A5531E510DB2}">
-      <thm15:themeFamily xmlns:thm15="http://schemas.microsoft.com/office/thememl/2012/main" name="Office Theme" id="{62F939B6-93AF-4DB8-9C6B-D6C7DFDC589F}" vid="{4A3C46E8-61CC-4603-A589-7422A47A8E4A}"/>
+      <thm15:themeFamily xmlns:thm15="http://schemas.microsoft.com/office/thememl/2012/main" name="Office Theme" id="{2E142A2C-CD16-42D6-873A-C26D2A0506FA}" vid="{1BDDFF52-6CD6-40A5-AB3C-68EB2F1E4D0A}"/>
     </a:ext>
   </a:extLst>
 </a:theme>
